--- a/exports/pptx/lessons/middle-module-09-subtraction-nikhilam/day-05-mid-module-check.pptx
+++ b/exports/pptx/lessons/middle-module-09-subtraction-nikhilam/day-05-mid-module-check.pptx
@@ -19,9 +19,12 @@
     <p:sldId id="267" r:id="rId13"/>
     <p:sldId id="268" r:id="rId14"/>
     <p:sldId id="269" r:id="rId15"/>
+    <p:sldId id="270" r:id="rId16"/>
+    <p:sldId id="271" r:id="rId17"/>
+    <p:sldId id="272" r:id="rId18"/>
   </p:sldIdLst>
   <p:notesMasterIdLst>
-    <p:notesMasterId r:id="rId16"/>
+    <p:notesMasterId r:id="rId19"/>
   </p:notesMasterIdLst>
   <p:sldSz cx="9144000" cy="5143500"/>
   <p:notesSz cx="5143500" cy="9144000"/>
@@ -979,6 +982,270 @@
             <a:fld id="{F7021451-1387-4CA6-816F-3879F97B5CBC}" type="slidenum">
               <a:rPr lang="en-US"/>
               <a:t>14</a:t>
+            </a:fld>
+            <a:endParaRPr lang="en-US"/>
+          </a:p>
+        </p:txBody>
+      </p:sp>
+    </p:spTree>
+    <p:extLst>
+      <p:ext uri="{BB962C8B-B14F-4D97-AF65-F5344CB8AC3E}">
+        <p14:creationId xmlns:p14="http://schemas.microsoft.com/office/powerpoint/2010/main" val="1024086991"/>
+      </p:ext>
+    </p:extLst>
+  </p:cSld>
+  <p:clrMapOvr>
+    <a:masterClrMapping/>
+  </p:clrMapOvr>
+</p:notes>
+</file>
+
+<file path=ppt/notesSlides/notesSlide15.xml><?xml version="1.0" encoding="utf-8"?>
+<p:notes xmlns:a="http://schemas.openxmlformats.org/drawingml/2006/main" xmlns:r="http://schemas.openxmlformats.org/officeDocument/2006/relationships" xmlns:p="http://schemas.openxmlformats.org/presentationml/2006/main">
+  <p:cSld>
+    <p:spTree>
+      <p:nvGrpSpPr>
+        <p:cNvPr id="1" name=""/>
+        <p:cNvGrpSpPr/>
+        <p:nvPr/>
+      </p:nvGrpSpPr>
+      <p:grpSpPr>
+        <a:xfrm>
+          <a:off x="0" y="0"/>
+          <a:ext cx="0" cy="0"/>
+          <a:chOff x="0" y="0"/>
+          <a:chExt cx="0" cy="0"/>
+        </a:xfrm>
+      </p:grpSpPr>
+      <p:sp>
+        <p:nvSpPr>
+          <p:cNvPr id="2" name="Slide Image Placeholder 1"/>
+          <p:cNvSpPr>
+            <a:spLocks noGrp="1" noRot="1" noChangeAspect="1"/>
+          </p:cNvSpPr>
+          <p:nvPr>
+            <p:ph type="sldImg"/>
+          </p:nvPr>
+        </p:nvSpPr>
+        <p:spPr/>
+      </p:sp>
+      <p:sp>
+        <p:nvSpPr>
+          <p:cNvPr id="3" name="Notes Placeholder 2"/>
+          <p:cNvSpPr>
+            <a:spLocks noGrp="1"/>
+          </p:cNvSpPr>
+          <p:nvPr>
+            <p:ph type="body" idx="1"/>
+          </p:nvPr>
+        </p:nvSpPr>
+        <p:spPr/>
+        <p:txBody>
+          <a:bodyPr/>
+          <a:lstStyle/>
+          <a:p>
+            <a:r>
+              <a:rPr lang="en-US" dirty="0"/>
+              <a:t/>
+            </a:r>
+            <a:endParaRPr lang="en-US" dirty="0"/>
+          </a:p>
+        </p:txBody>
+      </p:sp>
+      <p:sp>
+        <p:nvSpPr>
+          <p:cNvPr id="4" name="Slide Number Placeholder 3"/>
+          <p:cNvSpPr>
+            <a:spLocks noGrp="1"/>
+          </p:cNvSpPr>
+          <p:nvPr>
+            <p:ph type="sldNum" sz="quarter" idx="10"/>
+          </p:nvPr>
+        </p:nvSpPr>
+        <p:spPr/>
+        <p:txBody>
+          <a:bodyPr/>
+          <a:lstStyle/>
+          <a:p>
+            <a:fld id="{F7021451-1387-4CA6-816F-3879F97B5CBC}" type="slidenum">
+              <a:rPr lang="en-US"/>
+              <a:t>15</a:t>
+            </a:fld>
+            <a:endParaRPr lang="en-US"/>
+          </a:p>
+        </p:txBody>
+      </p:sp>
+    </p:spTree>
+    <p:extLst>
+      <p:ext uri="{BB962C8B-B14F-4D97-AF65-F5344CB8AC3E}">
+        <p14:creationId xmlns:p14="http://schemas.microsoft.com/office/powerpoint/2010/main" val="1024086991"/>
+      </p:ext>
+    </p:extLst>
+  </p:cSld>
+  <p:clrMapOvr>
+    <a:masterClrMapping/>
+  </p:clrMapOvr>
+</p:notes>
+</file>
+
+<file path=ppt/notesSlides/notesSlide16.xml><?xml version="1.0" encoding="utf-8"?>
+<p:notes xmlns:a="http://schemas.openxmlformats.org/drawingml/2006/main" xmlns:r="http://schemas.openxmlformats.org/officeDocument/2006/relationships" xmlns:p="http://schemas.openxmlformats.org/presentationml/2006/main">
+  <p:cSld>
+    <p:spTree>
+      <p:nvGrpSpPr>
+        <p:cNvPr id="1" name=""/>
+        <p:cNvGrpSpPr/>
+        <p:nvPr/>
+      </p:nvGrpSpPr>
+      <p:grpSpPr>
+        <a:xfrm>
+          <a:off x="0" y="0"/>
+          <a:ext cx="0" cy="0"/>
+          <a:chOff x="0" y="0"/>
+          <a:chExt cx="0" cy="0"/>
+        </a:xfrm>
+      </p:grpSpPr>
+      <p:sp>
+        <p:nvSpPr>
+          <p:cNvPr id="2" name="Slide Image Placeholder 1"/>
+          <p:cNvSpPr>
+            <a:spLocks noGrp="1" noRot="1" noChangeAspect="1"/>
+          </p:cNvSpPr>
+          <p:nvPr>
+            <p:ph type="sldImg"/>
+          </p:nvPr>
+        </p:nvSpPr>
+        <p:spPr/>
+      </p:sp>
+      <p:sp>
+        <p:nvSpPr>
+          <p:cNvPr id="3" name="Notes Placeholder 2"/>
+          <p:cNvSpPr>
+            <a:spLocks noGrp="1"/>
+          </p:cNvSpPr>
+          <p:nvPr>
+            <p:ph type="body" idx="1"/>
+          </p:nvPr>
+        </p:nvSpPr>
+        <p:spPr/>
+        <p:txBody>
+          <a:bodyPr/>
+          <a:lstStyle/>
+          <a:p>
+            <a:r>
+              <a:rPr lang="en-US" dirty="0"/>
+              <a:t/>
+            </a:r>
+            <a:endParaRPr lang="en-US" dirty="0"/>
+          </a:p>
+        </p:txBody>
+      </p:sp>
+      <p:sp>
+        <p:nvSpPr>
+          <p:cNvPr id="4" name="Slide Number Placeholder 3"/>
+          <p:cNvSpPr>
+            <a:spLocks noGrp="1"/>
+          </p:cNvSpPr>
+          <p:nvPr>
+            <p:ph type="sldNum" sz="quarter" idx="10"/>
+          </p:nvPr>
+        </p:nvSpPr>
+        <p:spPr/>
+        <p:txBody>
+          <a:bodyPr/>
+          <a:lstStyle/>
+          <a:p>
+            <a:fld id="{F7021451-1387-4CA6-816F-3879F97B5CBC}" type="slidenum">
+              <a:rPr lang="en-US"/>
+              <a:t>16</a:t>
+            </a:fld>
+            <a:endParaRPr lang="en-US"/>
+          </a:p>
+        </p:txBody>
+      </p:sp>
+    </p:spTree>
+    <p:extLst>
+      <p:ext uri="{BB962C8B-B14F-4D97-AF65-F5344CB8AC3E}">
+        <p14:creationId xmlns:p14="http://schemas.microsoft.com/office/powerpoint/2010/main" val="1024086991"/>
+      </p:ext>
+    </p:extLst>
+  </p:cSld>
+  <p:clrMapOvr>
+    <a:masterClrMapping/>
+  </p:clrMapOvr>
+</p:notes>
+</file>
+
+<file path=ppt/notesSlides/notesSlide17.xml><?xml version="1.0" encoding="utf-8"?>
+<p:notes xmlns:a="http://schemas.openxmlformats.org/drawingml/2006/main" xmlns:r="http://schemas.openxmlformats.org/officeDocument/2006/relationships" xmlns:p="http://schemas.openxmlformats.org/presentationml/2006/main">
+  <p:cSld>
+    <p:spTree>
+      <p:nvGrpSpPr>
+        <p:cNvPr id="1" name=""/>
+        <p:cNvGrpSpPr/>
+        <p:nvPr/>
+      </p:nvGrpSpPr>
+      <p:grpSpPr>
+        <a:xfrm>
+          <a:off x="0" y="0"/>
+          <a:ext cx="0" cy="0"/>
+          <a:chOff x="0" y="0"/>
+          <a:chExt cx="0" cy="0"/>
+        </a:xfrm>
+      </p:grpSpPr>
+      <p:sp>
+        <p:nvSpPr>
+          <p:cNvPr id="2" name="Slide Image Placeholder 1"/>
+          <p:cNvSpPr>
+            <a:spLocks noGrp="1" noRot="1" noChangeAspect="1"/>
+          </p:cNvSpPr>
+          <p:nvPr>
+            <p:ph type="sldImg"/>
+          </p:nvPr>
+        </p:nvSpPr>
+        <p:spPr/>
+      </p:sp>
+      <p:sp>
+        <p:nvSpPr>
+          <p:cNvPr id="3" name="Notes Placeholder 2"/>
+          <p:cNvSpPr>
+            <a:spLocks noGrp="1"/>
+          </p:cNvSpPr>
+          <p:nvPr>
+            <p:ph type="body" idx="1"/>
+          </p:nvPr>
+        </p:nvSpPr>
+        <p:spPr/>
+        <p:txBody>
+          <a:bodyPr/>
+          <a:lstStyle/>
+          <a:p>
+            <a:r>
+              <a:rPr lang="en-US" dirty="0"/>
+              <a:t/>
+            </a:r>
+            <a:endParaRPr lang="en-US" dirty="0"/>
+          </a:p>
+        </p:txBody>
+      </p:sp>
+      <p:sp>
+        <p:nvSpPr>
+          <p:cNvPr id="4" name="Slide Number Placeholder 3"/>
+          <p:cNvSpPr>
+            <a:spLocks noGrp="1"/>
+          </p:cNvSpPr>
+          <p:nvPr>
+            <p:ph type="sldNum" sz="quarter" idx="10"/>
+          </p:nvPr>
+        </p:nvSpPr>
+        <p:spPr/>
+        <p:txBody>
+          <a:bodyPr/>
+          <a:lstStyle/>
+          <a:p>
+            <a:fld id="{F7021451-1387-4CA6-816F-3879F97B5CBC}" type="slidenum">
+              <a:rPr lang="en-US"/>
+              <a:t>17</a:t>
             </a:fld>
             <a:endParaRPr lang="en-US"/>
           </a:p>
@@ -2278,102 +2545,6 @@
         </p:nvSpPr>
         <p:spPr>
           <a:xfrm>
-            <a:off x="406301" y="1223963"/>
-            <a:ext cx="8498026" cy="274290"/>
-          </a:xfrm>
-          <a:prstGeom prst="rect">
-            <a:avLst/>
-          </a:prstGeom>
-          <a:noFill/>
-          <a:ln/>
-        </p:spPr>
-        <p:txBody>
-          <a:bodyPr wrap="square" lIns="0" tIns="0" rIns="0" bIns="0" rtlCol="0" anchor="t"/>
-          <a:lstStyle/>
-          <a:p>
-            <a:pPr algn="l" indent="0" marL="0">
-              <a:lnSpc>
-                <a:spcPts val="2160"/>
-              </a:lnSpc>
-              <a:spcBef>
-                <a:spcPts val="600"/>
-              </a:spcBef>
-              <a:spcAft>
-                <a:spcPts val="800"/>
-              </a:spcAft>
-              <a:buNone/>
-            </a:pPr>
-            <a:r>
-              <a:rPr lang="en-US" sz="1800" b="1" dirty="0">
-                <a:solidFill>
-                  <a:srgbClr val="FE4447"/>
-                </a:solidFill>
-                <a:latin typeface="Georgia" pitchFamily="34" charset="0"/>
-                <a:ea typeface="Georgia" pitchFamily="34" charset="-122"/>
-                <a:cs typeface="Georgia" pitchFamily="34" charset="-120"/>
-              </a:rPr>
-              <a:t>Learning objective</a:t>
-            </a:r>
-            <a:endParaRPr lang="en-US" sz="1800" dirty="0"/>
-          </a:p>
-        </p:txBody>
-      </p:sp>
-      <p:sp>
-        <p:nvSpPr>
-          <p:cNvPr id="6" name="Text 4"/>
-          <p:cNvSpPr/>
-          <p:nvPr/>
-        </p:nvSpPr>
-        <p:spPr>
-          <a:xfrm>
-            <a:off x="406301" y="1637854"/>
-            <a:ext cx="8498026" cy="426541"/>
-          </a:xfrm>
-          <a:prstGeom prst="rect">
-            <a:avLst/>
-          </a:prstGeom>
-          <a:noFill/>
-          <a:ln/>
-        </p:spPr>
-        <p:txBody>
-          <a:bodyPr wrap="square" lIns="0" tIns="0" rIns="0" bIns="0" rtlCol="0" anchor="t"/>
-          <a:lstStyle/>
-          <a:p>
-            <a:pPr algn="l" indent="0" marL="0">
-              <a:lnSpc>
-                <a:spcPts val="1680"/>
-              </a:lnSpc>
-              <a:spcBef>
-                <a:spcPts val="300"/>
-              </a:spcBef>
-              <a:spcAft>
-                <a:spcPts val="300"/>
-              </a:spcAft>
-              <a:buNone/>
-            </a:pPr>
-            <a:r>
-              <a:rPr lang="en-US" sz="1200" dirty="0">
-                <a:solidFill>
-                  <a:srgbClr val="1C2833"/>
-                </a:solidFill>
-                <a:latin typeface="Arial" pitchFamily="34" charset="0"/>
-                <a:ea typeface="Arial" pitchFamily="34" charset="-122"/>
-                <a:cs typeface="Arial" pitchFamily="34" charset="-120"/>
-              </a:rPr>
-              <a:t>By the end of this lesson, students will retest the Day 1 baseline problem using the Nikhilam method, record the new time, and complete the formative quiz Part B that consolidates Days 1–4.</a:t>
-            </a:r>
-            <a:endParaRPr lang="en-US" sz="1200" dirty="0"/>
-          </a:p>
-        </p:txBody>
-      </p:sp>
-      <p:sp>
-        <p:nvSpPr>
-          <p:cNvPr id="7" name="Text 5"/>
-          <p:cNvSpPr/>
-          <p:nvPr/>
-        </p:nvSpPr>
-        <p:spPr>
-          <a:xfrm>
             <a:off x="406301" y="4434929"/>
             <a:ext cx="8498026" cy="213271"/>
           </a:xfrm>
@@ -2518,7 +2689,7 @@
                 <a:ea typeface="Georgia" pitchFamily="34" charset="-122"/>
                 <a:cs typeface="Georgia" pitchFamily="34" charset="-120"/>
               </a:rPr>
-              <a:t>Student-facing content</a:t>
+              <a:t>Diagnostic discussion (10 min) (cont.)</a:t>
             </a:r>
             <a:endParaRPr lang="en-US" sz="1800" dirty="0"/>
           </a:p>
@@ -2532,61 +2703,8 @@
         </p:nvSpPr>
         <p:spPr>
           <a:xfrm>
-            <a:off x="406301" y="883593"/>
-            <a:ext cx="8331398" cy="1919288"/>
-          </a:xfrm>
-          <a:prstGeom prst="rect">
-            <a:avLst/>
-          </a:prstGeom>
-          <a:solidFill>
-            <a:srgbClr val="F4F8F9"/>
-          </a:solidFill>
-          <a:ln/>
-        </p:spPr>
-        <p:txBody>
-          <a:bodyPr wrap="square" rtlCol="0" anchor="ctr"/>
-          <a:lstStyle/>
-          <a:p>
-            <a:pPr indent="0" marL="0">
-              <a:buNone/>
-            </a:pPr>
-            <a:endParaRPr lang="en-US" dirty="0"/>
-          </a:p>
-        </p:txBody>
-      </p:sp>
-      <p:sp>
-        <p:nvSpPr>
-          <p:cNvPr id="5" name="Shape 3"/>
-          <p:cNvSpPr/>
-          <p:nvPr/>
-        </p:nvSpPr>
-        <p:spPr>
-          <a:xfrm>
-            <a:off x="434876" y="883593"/>
-            <a:ext cx="0" cy="1919288"/>
-          </a:xfrm>
-          <a:prstGeom prst="line">
-            <a:avLst/>
-          </a:prstGeom>
-          <a:noFill/>
-          <a:ln w="57150">
-            <a:solidFill>
-              <a:srgbClr val="FE4447"/>
-            </a:solidFill>
-            <a:prstDash val="solid"/>
-          </a:ln>
-        </p:spPr>
-      </p:sp>
-      <p:sp>
-        <p:nvSpPr>
-          <p:cNvPr id="6" name="Text 4"/>
-          <p:cNvSpPr/>
-          <p:nvPr/>
-        </p:nvSpPr>
-        <p:spPr>
-          <a:xfrm>
-            <a:off x="692051" y="1074093"/>
-            <a:ext cx="7973389" cy="230981"/>
+            <a:off x="634901" y="883593"/>
+            <a:ext cx="8102798" cy="1649313"/>
           </a:xfrm>
           <a:prstGeom prst="rect">
             <a:avLst/>
@@ -2598,228 +2716,382 @@
           <a:bodyPr wrap="square" lIns="0" tIns="0" rIns="0" bIns="0" rtlCol="0" anchor="t"/>
           <a:lstStyle/>
           <a:p>
-            <a:pPr algn="l" indent="0" marL="0">
-              <a:lnSpc>
-                <a:spcPts val="1820"/>
-              </a:lnSpc>
-              <a:spcBef>
-                <a:spcPts val="300"/>
-              </a:spcBef>
-              <a:spcAft>
-                <a:spcPts val="300"/>
-              </a:spcAft>
-              <a:buNone/>
-            </a:pPr>
-            <a:r>
-              <a:rPr lang="en-US" sz="1300" b="1" i="1" dirty="0">
-                <a:solidFill>
-                  <a:srgbClr val="1C2833"/>
-                </a:solidFill>
-                <a:latin typeface="Georgia" pitchFamily="34" charset="0"/>
-                <a:ea typeface="Georgia" pitchFamily="34" charset="-122"/>
-                <a:cs typeface="Georgia" pitchFamily="34" charset="-120"/>
-              </a:rPr>
-              <a:t>Mid-module Check</a:t>
-            </a:r>
-            <a:endParaRPr lang="en-US" sz="1300" dirty="0"/>
-          </a:p>
-        </p:txBody>
-      </p:sp>
-      <p:sp>
-        <p:nvSpPr>
-          <p:cNvPr id="7" name="Text 5"/>
-          <p:cNvSpPr/>
-          <p:nvPr/>
-        </p:nvSpPr>
-        <p:spPr>
-          <a:xfrm>
-            <a:off x="692051" y="1343174"/>
-            <a:ext cx="7973389" cy="230981"/>
-          </a:xfrm>
-          <a:prstGeom prst="rect">
-            <a:avLst/>
-          </a:prstGeom>
-          <a:noFill/>
-          <a:ln/>
-        </p:spPr>
-        <p:txBody>
-          <a:bodyPr wrap="square" lIns="0" tIns="0" rIns="0" bIns="0" rtlCol="0" anchor="t"/>
-          <a:lstStyle/>
-          <a:p>
-            <a:pPr algn="l" indent="0" marL="0">
-              <a:lnSpc>
-                <a:spcPts val="1820"/>
-              </a:lnSpc>
-              <a:spcBef>
-                <a:spcPts val="300"/>
-              </a:spcBef>
-              <a:spcAft>
-                <a:spcPts val="300"/>
-              </a:spcAft>
-              <a:buNone/>
-            </a:pPr>
-            <a:r>
-              <a:rPr lang="en-US" sz="1300" i="1" dirty="0">
-                <a:solidFill>
-                  <a:srgbClr val="1C2833"/>
-                </a:solidFill>
-                <a:latin typeface="Georgia" pitchFamily="34" charset="0"/>
-                <a:ea typeface="Georgia" pitchFamily="34" charset="-122"/>
-                <a:cs typeface="Georgia" pitchFamily="34" charset="-120"/>
-              </a:rPr>
-              <a:t>Day 1 time: ____ sec → Day 5 time: ____ sec → % change: ____</a:t>
-            </a:r>
-            <a:endParaRPr lang="en-US" sz="1300" dirty="0"/>
-          </a:p>
-        </p:txBody>
-      </p:sp>
-      <p:sp>
-        <p:nvSpPr>
-          <p:cNvPr id="8" name="Text 6"/>
-          <p:cNvSpPr/>
-          <p:nvPr/>
-        </p:nvSpPr>
-        <p:spPr>
-          <a:xfrm>
-            <a:off x="692051" y="1612255"/>
-            <a:ext cx="7973389" cy="230981"/>
-          </a:xfrm>
-          <a:prstGeom prst="rect">
-            <a:avLst/>
-          </a:prstGeom>
-          <a:noFill/>
-          <a:ln/>
-        </p:spPr>
-        <p:txBody>
-          <a:bodyPr wrap="square" lIns="0" tIns="0" rIns="0" bIns="0" rtlCol="0" anchor="t"/>
-          <a:lstStyle/>
-          <a:p>
-            <a:pPr algn="l" indent="0" marL="0">
-              <a:lnSpc>
-                <a:spcPts val="1820"/>
-              </a:lnSpc>
-              <a:spcBef>
-                <a:spcPts val="300"/>
-              </a:spcBef>
-              <a:spcAft>
-                <a:spcPts val="300"/>
-              </a:spcAft>
-              <a:buNone/>
-            </a:pPr>
-            <a:r>
-              <a:rPr lang="en-US" sz="1300" i="1" dirty="0">
-                <a:solidFill>
-                  <a:srgbClr val="1C2833"/>
-                </a:solidFill>
-                <a:latin typeface="Georgia" pitchFamily="34" charset="0"/>
-                <a:ea typeface="Georgia" pitchFamily="34" charset="-122"/>
-                <a:cs typeface="Georgia" pitchFamily="34" charset="-120"/>
-              </a:rPr>
-              <a:t>If you improved less than expected, the most common reason is one of three things:</a:t>
-            </a:r>
-            <a:endParaRPr lang="en-US" sz="1300" dirty="0"/>
-          </a:p>
-        </p:txBody>
-      </p:sp>
-      <p:sp>
-        <p:nvSpPr>
-          <p:cNvPr id="9" name="Text 7"/>
-          <p:cNvSpPr/>
-          <p:nvPr/>
-        </p:nvSpPr>
-        <p:spPr>
-          <a:xfrm>
-            <a:off x="692051" y="1881336"/>
-            <a:ext cx="7973389" cy="461963"/>
-          </a:xfrm>
-          <a:prstGeom prst="rect">
-            <a:avLst/>
-          </a:prstGeom>
-          <a:noFill/>
-          <a:ln/>
-        </p:spPr>
-        <p:txBody>
-          <a:bodyPr wrap="square" lIns="0" tIns="0" rIns="0" bIns="0" rtlCol="0" anchor="t"/>
-          <a:lstStyle/>
-          <a:p>
-            <a:pPr algn="l" indent="0" marL="0">
-              <a:lnSpc>
-                <a:spcPts val="1820"/>
-              </a:lnSpc>
-              <a:spcBef>
-                <a:spcPts val="300"/>
-              </a:spcBef>
-              <a:spcAft>
-                <a:spcPts val="300"/>
-              </a:spcAft>
-              <a:buNone/>
-            </a:pPr>
-            <a:r>
-              <a:rPr lang="en-US" sz="1300" i="1" dirty="0">
-                <a:solidFill>
-                  <a:srgbClr val="1C2833"/>
-                </a:solidFill>
-                <a:latin typeface="Georgia" pitchFamily="34" charset="0"/>
-                <a:ea typeface="Georgia" pitchFamily="34" charset="-122"/>
-                <a:cs typeface="Georgia" pitchFamily="34" charset="-120"/>
-              </a:rPr>
-              <a:t>1. Padding error — you forgot leading zeros. 2. Last-digit error — you used "from 9" for the last digit instead of "from 10." 3. You're still translating mentally between "borrow" and "complement."</a:t>
-            </a:r>
-            <a:endParaRPr lang="en-US" sz="1300" dirty="0"/>
-          </a:p>
-        </p:txBody>
-      </p:sp>
-      <p:sp>
-        <p:nvSpPr>
-          <p:cNvPr id="10" name="Text 8"/>
-          <p:cNvSpPr/>
-          <p:nvPr/>
-        </p:nvSpPr>
-        <p:spPr>
-          <a:xfrm>
-            <a:off x="692051" y="2381399"/>
-            <a:ext cx="7973389" cy="230981"/>
-          </a:xfrm>
-          <a:prstGeom prst="rect">
-            <a:avLst/>
-          </a:prstGeom>
-          <a:noFill/>
-          <a:ln/>
-        </p:spPr>
-        <p:txBody>
-          <a:bodyPr wrap="square" lIns="0" tIns="0" rIns="0" bIns="0" rtlCol="0" anchor="t"/>
-          <a:lstStyle/>
-          <a:p>
-            <a:pPr algn="l" indent="0" marL="0">
-              <a:lnSpc>
-                <a:spcPts val="1820"/>
-              </a:lnSpc>
-              <a:spcBef>
-                <a:spcPts val="300"/>
-              </a:spcBef>
-              <a:spcAft>
-                <a:spcPts val="300"/>
-              </a:spcAft>
-              <a:buNone/>
-            </a:pPr>
-            <a:r>
-              <a:rPr lang="en-US" sz="1300" i="1" dirty="0">
-                <a:solidFill>
-                  <a:srgbClr val="1C2833"/>
-                </a:solidFill>
-                <a:latin typeface="Georgia" pitchFamily="34" charset="0"/>
-                <a:ea typeface="Georgia" pitchFamily="34" charset="-122"/>
-                <a:cs typeface="Georgia" pitchFamily="34" charset="-120"/>
-              </a:rPr>
-              <a:t>Don't panic. Days 6–9 fix all three.</a:t>
-            </a:r>
-            <a:endParaRPr lang="en-US" sz="1300" dirty="0"/>
-          </a:p>
-        </p:txBody>
-      </p:sp>
-      <p:sp>
-        <p:nvSpPr>
-          <p:cNvPr id="11" name="Text 9"/>
+            <a:pPr algn="l" marL="342900" indent="-342900">
+              <a:lnSpc>
+                <a:spcPts val="1620"/>
+              </a:lnSpc>
+              <a:spcAft>
+                <a:spcPts val="300"/>
+              </a:spcAft>
+              <a:buSzPct val="100000"/>
+              <a:buChar char="•"/>
+            </a:pPr>
+            <a:r>
+              <a:rPr lang="en-US" sz="1200" b="1" dirty="0">
+                <a:solidFill>
+                  <a:srgbClr val="1C2833"/>
+                </a:solidFill>
+                <a:latin typeface="Arial" pitchFamily="34" charset="0"/>
+                <a:ea typeface="Arial" pitchFamily="34" charset="-122"/>
+                <a:cs typeface="Arial" pitchFamily="34" charset="-120"/>
+              </a:rPr>
+              <a:t>Padding error</a:t>
+            </a:r>
+            <a:pPr algn="l" indent="0" marL="0">
+              <a:lnSpc>
+                <a:spcPts val="1620"/>
+              </a:lnSpc>
+              <a:spcAft>
+                <a:spcPts val="300"/>
+              </a:spcAft>
+              <a:buNone/>
+            </a:pPr>
+            <a:r>
+              <a:rPr lang="en-US" sz="1200" dirty="0">
+                <a:solidFill>
+                  <a:srgbClr val="1C2833"/>
+                </a:solidFill>
+                <a:latin typeface="Arial" pitchFamily="34" charset="0"/>
+                <a:ea typeface="Arial" pitchFamily="34" charset="-122"/>
+                <a:cs typeface="Arial" pitchFamily="34" charset="-120"/>
+              </a:rPr>
+              <a:t> — student wrote </a:t>
+            </a:r>
+            <a:pPr algn="l" indent="0" marL="0">
+              <a:lnSpc>
+                <a:spcPts val="1620"/>
+              </a:lnSpc>
+              <a:spcAft>
+                <a:spcPts val="300"/>
+              </a:spcAft>
+              <a:buNone/>
+            </a:pPr>
+            <a:r>
+              <a:rPr lang="en-US" sz="1200" dirty="0">
+                <a:solidFill>
+                  <a:srgbClr val="1C2833"/>
+                </a:solidFill>
+                <a:latin typeface="Arial" pitchFamily="34" charset="0"/>
+                <a:ea typeface="Arial" pitchFamily="34" charset="-122"/>
+                <a:cs typeface="Arial" pitchFamily="34" charset="-120"/>
+              </a:rPr>
+              <a:t>10000 − 89 = 9921</a:t>
+            </a:r>
+            <a:pPr algn="l" indent="0" marL="0">
+              <a:lnSpc>
+                <a:spcPts val="1620"/>
+              </a:lnSpc>
+              <a:spcAft>
+                <a:spcPts val="300"/>
+              </a:spcAft>
+              <a:buNone/>
+            </a:pPr>
+            <a:r>
+              <a:rPr lang="en-US" sz="1200" dirty="0">
+                <a:solidFill>
+                  <a:srgbClr val="1C2833"/>
+                </a:solidFill>
+                <a:latin typeface="Arial" pitchFamily="34" charset="0"/>
+                <a:ea typeface="Arial" pitchFamily="34" charset="-122"/>
+                <a:cs typeface="Arial" pitchFamily="34" charset="-120"/>
+              </a:rPr>
+              <a:t> because they treated 89 as "8 9" not "0 0 8 9." Reteach: pad with leading zeros to match the base's digit count.</a:t>
+            </a:r>
+            <a:endParaRPr lang="en-US" sz="1200" dirty="0"/>
+          </a:p>
+          <a:p>
+            <a:pPr algn="l" marL="342900" indent="-342900">
+              <a:lnSpc>
+                <a:spcPts val="1620"/>
+              </a:lnSpc>
+              <a:spcAft>
+                <a:spcPts val="300"/>
+              </a:spcAft>
+              <a:buSzPct val="100000"/>
+              <a:buChar char="•"/>
+            </a:pPr>
+            <a:r>
+              <a:rPr lang="en-US" sz="1200" b="1" dirty="0">
+                <a:solidFill>
+                  <a:srgbClr val="1C2833"/>
+                </a:solidFill>
+                <a:latin typeface="Arial" pitchFamily="34" charset="0"/>
+                <a:ea typeface="Arial" pitchFamily="34" charset="-122"/>
+                <a:cs typeface="Arial" pitchFamily="34" charset="-120"/>
+              </a:rPr>
+              <a:t>Last-digit error</a:t>
+            </a:r>
+            <a:pPr algn="l" indent="0" marL="0">
+              <a:lnSpc>
+                <a:spcPts val="1620"/>
+              </a:lnSpc>
+              <a:spcAft>
+                <a:spcPts val="300"/>
+              </a:spcAft>
+              <a:buNone/>
+            </a:pPr>
+            <a:r>
+              <a:rPr lang="en-US" sz="1200" dirty="0">
+                <a:solidFill>
+                  <a:srgbClr val="1C2833"/>
+                </a:solidFill>
+                <a:latin typeface="Arial" pitchFamily="34" charset="0"/>
+                <a:ea typeface="Arial" pitchFamily="34" charset="-122"/>
+                <a:cs typeface="Arial" pitchFamily="34" charset="-120"/>
+              </a:rPr>
+              <a:t> — student wrote </a:t>
+            </a:r>
+            <a:pPr algn="l" indent="0" marL="0">
+              <a:lnSpc>
+                <a:spcPts val="1620"/>
+              </a:lnSpc>
+              <a:spcAft>
+                <a:spcPts val="300"/>
+              </a:spcAft>
+              <a:buNone/>
+            </a:pPr>
+            <a:r>
+              <a:rPr lang="en-US" sz="1200" dirty="0">
+                <a:solidFill>
+                  <a:srgbClr val="1C2833"/>
+                </a:solidFill>
+                <a:latin typeface="Arial" pitchFamily="34" charset="0"/>
+                <a:ea typeface="Arial" pitchFamily="34" charset="-122"/>
+                <a:cs typeface="Arial" pitchFamily="34" charset="-120"/>
+              </a:rPr>
+              <a:t>9-7 = 2</a:t>
+            </a:r>
+            <a:pPr algn="l" indent="0" marL="0">
+              <a:lnSpc>
+                <a:spcPts val="1620"/>
+              </a:lnSpc>
+              <a:spcAft>
+                <a:spcPts val="300"/>
+              </a:spcAft>
+              <a:buNone/>
+            </a:pPr>
+            <a:r>
+              <a:rPr lang="en-US" sz="1200" dirty="0">
+                <a:solidFill>
+                  <a:srgbClr val="1C2833"/>
+                </a:solidFill>
+                <a:latin typeface="Arial" pitchFamily="34" charset="0"/>
+                <a:ea typeface="Arial" pitchFamily="34" charset="-122"/>
+                <a:cs typeface="Arial" pitchFamily="34" charset="-120"/>
+              </a:rPr>
+              <a:t> for the units instead of </a:t>
+            </a:r>
+            <a:pPr algn="l" indent="0" marL="0">
+              <a:lnSpc>
+                <a:spcPts val="1620"/>
+              </a:lnSpc>
+              <a:spcAft>
+                <a:spcPts val="300"/>
+              </a:spcAft>
+              <a:buNone/>
+            </a:pPr>
+            <a:r>
+              <a:rPr lang="en-US" sz="1200" dirty="0">
+                <a:solidFill>
+                  <a:srgbClr val="1C2833"/>
+                </a:solidFill>
+                <a:latin typeface="Arial" pitchFamily="34" charset="0"/>
+                <a:ea typeface="Arial" pitchFamily="34" charset="-122"/>
+                <a:cs typeface="Arial" pitchFamily="34" charset="-120"/>
+              </a:rPr>
+              <a:t>10-7 = 3</a:t>
+            </a:r>
+            <a:pPr algn="l" indent="0" marL="0">
+              <a:lnSpc>
+                <a:spcPts val="1620"/>
+              </a:lnSpc>
+              <a:spcAft>
+                <a:spcPts val="300"/>
+              </a:spcAft>
+              <a:buNone/>
+            </a:pPr>
+            <a:r>
+              <a:rPr lang="en-US" sz="1200" dirty="0">
+                <a:solidFill>
+                  <a:srgbClr val="1C2833"/>
+                </a:solidFill>
+                <a:latin typeface="Arial" pitchFamily="34" charset="0"/>
+                <a:ea typeface="Arial" pitchFamily="34" charset="-122"/>
+                <a:cs typeface="Arial" pitchFamily="34" charset="-120"/>
+              </a:rPr>
+              <a:t>. Reteach: the LAST digit always takes from 10. Always.</a:t>
+            </a:r>
+            <a:endParaRPr lang="en-US" sz="1200" dirty="0"/>
+          </a:p>
+          <a:p>
+            <a:pPr algn="l" marL="342900" indent="-342900">
+              <a:lnSpc>
+                <a:spcPts val="1620"/>
+              </a:lnSpc>
+              <a:spcAft>
+                <a:spcPts val="300"/>
+              </a:spcAft>
+              <a:buSzPct val="100000"/>
+              <a:buChar char="•"/>
+            </a:pPr>
+            <a:r>
+              <a:rPr lang="en-US" sz="1200" b="1" dirty="0">
+                <a:solidFill>
+                  <a:srgbClr val="1C2833"/>
+                </a:solidFill>
+                <a:latin typeface="Arial" pitchFamily="34" charset="0"/>
+                <a:ea typeface="Arial" pitchFamily="34" charset="-122"/>
+                <a:cs typeface="Arial" pitchFamily="34" charset="-120"/>
+              </a:rPr>
+              <a:t>Trailing-zero handling</a:t>
+            </a:r>
+            <a:pPr algn="l" indent="0" marL="0">
+              <a:lnSpc>
+                <a:spcPts val="1620"/>
+              </a:lnSpc>
+              <a:spcAft>
+                <a:spcPts val="300"/>
+              </a:spcAft>
+              <a:buNone/>
+            </a:pPr>
+            <a:r>
+              <a:rPr lang="en-US" sz="1200" dirty="0">
+                <a:solidFill>
+                  <a:srgbClr val="1C2833"/>
+                </a:solidFill>
+                <a:latin typeface="Arial" pitchFamily="34" charset="0"/>
+                <a:ea typeface="Arial" pitchFamily="34" charset="-122"/>
+                <a:cs typeface="Arial" pitchFamily="34" charset="-120"/>
+              </a:rPr>
+              <a:t> — </a:t>
+            </a:r>
+            <a:pPr algn="l" indent="0" marL="0">
+              <a:lnSpc>
+                <a:spcPts val="1620"/>
+              </a:lnSpc>
+              <a:spcAft>
+                <a:spcPts val="300"/>
+              </a:spcAft>
+              <a:buNone/>
+            </a:pPr>
+            <a:r>
+              <a:rPr lang="en-US" sz="1200" dirty="0">
+                <a:solidFill>
+                  <a:srgbClr val="1C2833"/>
+                </a:solidFill>
+                <a:latin typeface="Arial" pitchFamily="34" charset="0"/>
+                <a:ea typeface="Arial" pitchFamily="34" charset="-122"/>
+                <a:cs typeface="Arial" pitchFamily="34" charset="-120"/>
+              </a:rPr>
+              <a:t>1000 − 70</a:t>
+            </a:r>
+            <a:pPr algn="l" indent="0" marL="0">
+              <a:lnSpc>
+                <a:spcPts val="1620"/>
+              </a:lnSpc>
+              <a:spcAft>
+                <a:spcPts val="300"/>
+              </a:spcAft>
+              <a:buNone/>
+            </a:pPr>
+            <a:r>
+              <a:rPr lang="en-US" sz="1200" dirty="0">
+                <a:solidFill>
+                  <a:srgbClr val="1C2833"/>
+                </a:solidFill>
+                <a:latin typeface="Arial" pitchFamily="34" charset="0"/>
+                <a:ea typeface="Arial" pitchFamily="34" charset="-122"/>
+                <a:cs typeface="Arial" pitchFamily="34" charset="-120"/>
+              </a:rPr>
+              <a:t>: digit-wise gives </a:t>
+            </a:r>
+            <a:pPr algn="l" indent="0" marL="0">
+              <a:lnSpc>
+                <a:spcPts val="1620"/>
+              </a:lnSpc>
+              <a:spcAft>
+                <a:spcPts val="300"/>
+              </a:spcAft>
+              <a:buNone/>
+            </a:pPr>
+            <a:r>
+              <a:rPr lang="en-US" sz="1200" dirty="0">
+                <a:solidFill>
+                  <a:srgbClr val="1C2833"/>
+                </a:solidFill>
+                <a:latin typeface="Arial" pitchFamily="34" charset="0"/>
+                <a:ea typeface="Arial" pitchFamily="34" charset="-122"/>
+                <a:cs typeface="Arial" pitchFamily="34" charset="-120"/>
+              </a:rPr>
+              <a:t>9-0, 9-7, 10-0 = 9, 2, 10</a:t>
+            </a:r>
+            <a:pPr algn="l" indent="0" marL="0">
+              <a:lnSpc>
+                <a:spcPts val="1620"/>
+              </a:lnSpc>
+              <a:spcAft>
+                <a:spcPts val="300"/>
+              </a:spcAft>
+              <a:buNone/>
+            </a:pPr>
+            <a:r>
+              <a:rPr lang="en-US" sz="1200" dirty="0">
+                <a:solidFill>
+                  <a:srgbClr val="1C2833"/>
+                </a:solidFill>
+                <a:latin typeface="Arial" pitchFamily="34" charset="0"/>
+                <a:ea typeface="Arial" pitchFamily="34" charset="-122"/>
+                <a:cs typeface="Arial" pitchFamily="34" charset="-120"/>
+              </a:rPr>
+              <a:t>. The 10 carries: </a:t>
+            </a:r>
+            <a:pPr algn="l" indent="0" marL="0">
+              <a:lnSpc>
+                <a:spcPts val="1620"/>
+              </a:lnSpc>
+              <a:spcAft>
+                <a:spcPts val="300"/>
+              </a:spcAft>
+              <a:buNone/>
+            </a:pPr>
+            <a:r>
+              <a:rPr lang="en-US" sz="1200" dirty="0">
+                <a:solidFill>
+                  <a:srgbClr val="1C2833"/>
+                </a:solidFill>
+                <a:latin typeface="Arial" pitchFamily="34" charset="0"/>
+                <a:ea typeface="Arial" pitchFamily="34" charset="-122"/>
+                <a:cs typeface="Arial" pitchFamily="34" charset="-120"/>
+              </a:rPr>
+              <a:t>9, 3, 0</a:t>
+            </a:r>
+            <a:pPr algn="l" indent="0" marL="0">
+              <a:lnSpc>
+                <a:spcPts val="1620"/>
+              </a:lnSpc>
+              <a:spcAft>
+                <a:spcPts val="300"/>
+              </a:spcAft>
+              <a:buNone/>
+            </a:pPr>
+            <a:r>
+              <a:rPr lang="en-US" sz="1200" dirty="0">
+                <a:solidFill>
+                  <a:srgbClr val="1C2833"/>
+                </a:solidFill>
+                <a:latin typeface="Arial" pitchFamily="34" charset="0"/>
+                <a:ea typeface="Arial" pitchFamily="34" charset="-122"/>
+                <a:cs typeface="Arial" pitchFamily="34" charset="-120"/>
+              </a:rPr>
+              <a:t> → 930. Verify: 70 + 930 = 1000. ✓. Acknowledge this is a corner case; offer the easier "see 70 as 070, complement directly" framing.</a:t>
+            </a:r>
+            <a:endParaRPr lang="en-US" sz="1200" dirty="0"/>
+          </a:p>
+        </p:txBody>
+      </p:sp>
+      <p:sp>
+        <p:nvSpPr>
+          <p:cNvPr id="5" name="Text 3"/>
           <p:cNvSpPr/>
           <p:nvPr/>
         </p:nvSpPr>
@@ -2969,7 +3241,7 @@
                 <a:ea typeface="Georgia" pitchFamily="34" charset="-122"/>
                 <a:cs typeface="Georgia" pitchFamily="34" charset="-120"/>
               </a:rPr>
-              <a:t>Homework</a:t>
+              <a:t>Diagnostic discussion (10 min) (cont.)</a:t>
             </a:r>
             <a:endParaRPr lang="en-US" sz="1800" dirty="0"/>
           </a:p>
@@ -2983,8 +3255,8 @@
         </p:nvSpPr>
         <p:spPr>
           <a:xfrm>
-            <a:off x="406301" y="870942"/>
-            <a:ext cx="8498026" cy="649337"/>
+            <a:off x="634901" y="883593"/>
+            <a:ext cx="8102798" cy="281880"/>
           </a:xfrm>
           <a:prstGeom prst="rect">
             <a:avLst/>
@@ -2996,304 +3268,26 @@
           <a:bodyPr wrap="square" lIns="0" tIns="0" rIns="0" bIns="0" rtlCol="0" anchor="t"/>
           <a:lstStyle/>
           <a:p>
-            <a:pPr algn="l" indent="0" marL="0">
-              <a:lnSpc>
-                <a:spcPts val="1680"/>
-              </a:lnSpc>
-              <a:spcBef>
-                <a:spcPts val="300"/>
-              </a:spcBef>
-              <a:spcAft>
-                <a:spcPts val="300"/>
-              </a:spcAft>
-              <a:buNone/>
-            </a:pPr>
-            <a:r>
-              <a:rPr lang="en-US" sz="1200" dirty="0">
-                <a:solidFill>
-                  <a:srgbClr val="1C2833"/>
-                </a:solidFill>
-                <a:latin typeface="Arial" pitchFamily="34" charset="0"/>
-                <a:ea typeface="Arial" pitchFamily="34" charset="-122"/>
-                <a:cs typeface="Arial" pitchFamily="34" charset="-120"/>
-              </a:rPr>
-              <a:t>– Choose your project format (shopkeeper chart / video / poster) and write a 3-sentence plan. – 5 mixed Nikhilam subtractions: </a:t>
-            </a:r>
-            <a:pPr algn="l" indent="0" marL="0">
-              <a:lnSpc>
-                <a:spcPts val="1680"/>
-              </a:lnSpc>
-              <a:spcBef>
-                <a:spcPts val="300"/>
-              </a:spcBef>
-              <a:spcAft>
-                <a:spcPts val="300"/>
-              </a:spcAft>
-              <a:buNone/>
-            </a:pPr>
-            <a:r>
-              <a:rPr lang="en-US" sz="1200" dirty="0">
-                <a:solidFill>
-                  <a:srgbClr val="1C2833"/>
-                </a:solidFill>
-                <a:latin typeface="Arial" pitchFamily="34" charset="0"/>
-                <a:ea typeface="Arial" pitchFamily="34" charset="-122"/>
-                <a:cs typeface="Arial" pitchFamily="34" charset="-120"/>
-              </a:rPr>
-              <a:t>1000 − 358</a:t>
-            </a:r>
-            <a:pPr algn="l" indent="0" marL="0">
-              <a:lnSpc>
-                <a:spcPts val="1680"/>
-              </a:lnSpc>
-              <a:spcBef>
-                <a:spcPts val="300"/>
-              </a:spcBef>
-              <a:spcAft>
-                <a:spcPts val="300"/>
-              </a:spcAft>
-              <a:buNone/>
-            </a:pPr>
-            <a:r>
-              <a:rPr lang="en-US" sz="1200" dirty="0">
-                <a:solidFill>
-                  <a:srgbClr val="1C2833"/>
-                </a:solidFill>
-                <a:latin typeface="Arial" pitchFamily="34" charset="0"/>
-                <a:ea typeface="Arial" pitchFamily="34" charset="-122"/>
-                <a:cs typeface="Arial" pitchFamily="34" charset="-120"/>
-              </a:rPr>
-              <a:t>, </a:t>
-            </a:r>
-            <a:pPr algn="l" indent="0" marL="0">
-              <a:lnSpc>
-                <a:spcPts val="1680"/>
-              </a:lnSpc>
-              <a:spcBef>
-                <a:spcPts val="300"/>
-              </a:spcBef>
-              <a:spcAft>
-                <a:spcPts val="300"/>
-              </a:spcAft>
-              <a:buNone/>
-            </a:pPr>
-            <a:r>
-              <a:rPr lang="en-US" sz="1200" dirty="0">
-                <a:solidFill>
-                  <a:srgbClr val="1C2833"/>
-                </a:solidFill>
-                <a:latin typeface="Arial" pitchFamily="34" charset="0"/>
-                <a:ea typeface="Arial" pitchFamily="34" charset="-122"/>
-                <a:cs typeface="Arial" pitchFamily="34" charset="-120"/>
-              </a:rPr>
-              <a:t>10 000 − 6427</a:t>
-            </a:r>
-            <a:pPr algn="l" indent="0" marL="0">
-              <a:lnSpc>
-                <a:spcPts val="1680"/>
-              </a:lnSpc>
-              <a:spcBef>
-                <a:spcPts val="300"/>
-              </a:spcBef>
-              <a:spcAft>
-                <a:spcPts val="300"/>
-              </a:spcAft>
-              <a:buNone/>
-            </a:pPr>
-            <a:r>
-              <a:rPr lang="en-US" sz="1200" dirty="0">
-                <a:solidFill>
-                  <a:srgbClr val="1C2833"/>
-                </a:solidFill>
-                <a:latin typeface="Arial" pitchFamily="34" charset="0"/>
-                <a:ea typeface="Arial" pitchFamily="34" charset="-122"/>
-                <a:cs typeface="Arial" pitchFamily="34" charset="-120"/>
-              </a:rPr>
-              <a:t>, </a:t>
-            </a:r>
-            <a:pPr algn="l" indent="0" marL="0">
-              <a:lnSpc>
-                <a:spcPts val="1680"/>
-              </a:lnSpc>
-              <a:spcBef>
-                <a:spcPts val="300"/>
-              </a:spcBef>
-              <a:spcAft>
-                <a:spcPts val="300"/>
-              </a:spcAft>
-              <a:buNone/>
-            </a:pPr>
-            <a:r>
-              <a:rPr lang="en-US" sz="1200" dirty="0">
-                <a:solidFill>
-                  <a:srgbClr val="1C2833"/>
-                </a:solidFill>
-                <a:latin typeface="Arial" pitchFamily="34" charset="0"/>
-                <a:ea typeface="Arial" pitchFamily="34" charset="-122"/>
-                <a:cs typeface="Arial" pitchFamily="34" charset="-120"/>
-              </a:rPr>
-              <a:t>1000 − 72</a:t>
-            </a:r>
-            <a:pPr algn="l" indent="0" marL="0">
-              <a:lnSpc>
-                <a:spcPts val="1680"/>
-              </a:lnSpc>
-              <a:spcBef>
-                <a:spcPts val="300"/>
-              </a:spcBef>
-              <a:spcAft>
-                <a:spcPts val="300"/>
-              </a:spcAft>
-              <a:buNone/>
-            </a:pPr>
-            <a:r>
-              <a:rPr lang="en-US" sz="1200" dirty="0">
-                <a:solidFill>
-                  <a:srgbClr val="1C2833"/>
-                </a:solidFill>
-                <a:latin typeface="Arial" pitchFamily="34" charset="0"/>
-                <a:ea typeface="Arial" pitchFamily="34" charset="-122"/>
-                <a:cs typeface="Arial" pitchFamily="34" charset="-120"/>
-              </a:rPr>
-              <a:t>, </a:t>
-            </a:r>
-            <a:pPr algn="l" indent="0" marL="0">
-              <a:lnSpc>
-                <a:spcPts val="1680"/>
-              </a:lnSpc>
-              <a:spcBef>
-                <a:spcPts val="300"/>
-              </a:spcBef>
-              <a:spcAft>
-                <a:spcPts val="300"/>
-              </a:spcAft>
-              <a:buNone/>
-            </a:pPr>
-            <a:r>
-              <a:rPr lang="en-US" sz="1200" dirty="0">
-                <a:solidFill>
-                  <a:srgbClr val="1C2833"/>
-                </a:solidFill>
-                <a:latin typeface="Arial" pitchFamily="34" charset="0"/>
-                <a:ea typeface="Arial" pitchFamily="34" charset="-122"/>
-                <a:cs typeface="Arial" pitchFamily="34" charset="-120"/>
-              </a:rPr>
-              <a:t>100 000 − 12 345</a:t>
-            </a:r>
-            <a:pPr algn="l" indent="0" marL="0">
-              <a:lnSpc>
-                <a:spcPts val="1680"/>
-              </a:lnSpc>
-              <a:spcBef>
-                <a:spcPts val="300"/>
-              </a:spcBef>
-              <a:spcAft>
-                <a:spcPts val="300"/>
-              </a:spcAft>
-              <a:buNone/>
-            </a:pPr>
-            <a:r>
-              <a:rPr lang="en-US" sz="1200" dirty="0">
-                <a:solidFill>
-                  <a:srgbClr val="1C2833"/>
-                </a:solidFill>
-                <a:latin typeface="Arial" pitchFamily="34" charset="0"/>
-                <a:ea typeface="Arial" pitchFamily="34" charset="-122"/>
-                <a:cs typeface="Arial" pitchFamily="34" charset="-120"/>
-              </a:rPr>
-              <a:t>, </a:t>
-            </a:r>
-            <a:pPr algn="l" indent="0" marL="0">
-              <a:lnSpc>
-                <a:spcPts val="1680"/>
-              </a:lnSpc>
-              <a:spcBef>
-                <a:spcPts val="300"/>
-              </a:spcBef>
-              <a:spcAft>
-                <a:spcPts val="300"/>
-              </a:spcAft>
-              <a:buNone/>
-            </a:pPr>
-            <a:r>
-              <a:rPr lang="en-US" sz="1200" dirty="0">
-                <a:solidFill>
-                  <a:srgbClr val="1C2833"/>
-                </a:solidFill>
-                <a:latin typeface="Arial" pitchFamily="34" charset="0"/>
-                <a:ea typeface="Arial" pitchFamily="34" charset="-122"/>
-                <a:cs typeface="Arial" pitchFamily="34" charset="-120"/>
-              </a:rPr>
-              <a:t>10 000 − 9</a:t>
-            </a:r>
-            <a:pPr algn="l" indent="0" marL="0">
-              <a:lnSpc>
-                <a:spcPts val="1680"/>
-              </a:lnSpc>
-              <a:spcBef>
-                <a:spcPts val="300"/>
-              </a:spcBef>
-              <a:spcAft>
-                <a:spcPts val="300"/>
-              </a:spcAft>
-              <a:buNone/>
-            </a:pPr>
-            <a:r>
-              <a:rPr lang="en-US" sz="1200" dirty="0">
-                <a:solidFill>
-                  <a:srgbClr val="1C2833"/>
-                </a:solidFill>
-                <a:latin typeface="Arial" pitchFamily="34" charset="0"/>
-                <a:ea typeface="Arial" pitchFamily="34" charset="-122"/>
-                <a:cs typeface="Arial" pitchFamily="34" charset="-120"/>
-              </a:rPr>
-              <a:t>. (Last one is </a:t>
-            </a:r>
-            <a:pPr algn="l" indent="0" marL="0">
-              <a:lnSpc>
-                <a:spcPts val="1680"/>
-              </a:lnSpc>
-              <a:spcBef>
-                <a:spcPts val="300"/>
-              </a:spcBef>
-              <a:spcAft>
-                <a:spcPts val="300"/>
-              </a:spcAft>
-              <a:buNone/>
-            </a:pPr>
-            <a:r>
-              <a:rPr lang="en-US" sz="1200" dirty="0">
-                <a:solidFill>
-                  <a:srgbClr val="1C2833"/>
-                </a:solidFill>
-                <a:latin typeface="Arial" pitchFamily="34" charset="0"/>
-                <a:ea typeface="Arial" pitchFamily="34" charset="-122"/>
-                <a:cs typeface="Arial" pitchFamily="34" charset="-120"/>
-              </a:rPr>
-              <a:t>9991</a:t>
-            </a:r>
-            <a:pPr algn="l" indent="0" marL="0">
-              <a:lnSpc>
-                <a:spcPts val="1680"/>
-              </a:lnSpc>
-              <a:spcBef>
-                <a:spcPts val="300"/>
-              </a:spcBef>
-              <a:spcAft>
-                <a:spcPts val="300"/>
-              </a:spcAft>
-              <a:buNone/>
-            </a:pPr>
-            <a:r>
-              <a:rPr lang="en-US" sz="1200" dirty="0">
-                <a:solidFill>
-                  <a:srgbClr val="1C2833"/>
-                </a:solidFill>
-                <a:latin typeface="Arial" pitchFamily="34" charset="0"/>
-                <a:ea typeface="Arial" pitchFamily="34" charset="-122"/>
-                <a:cs typeface="Arial" pitchFamily="34" charset="-120"/>
-              </a:rPr>
-              <a:t>; check the padding!)</a:t>
+            <a:pPr algn="l" marL="342900" indent="-342900">
+              <a:lnSpc>
+                <a:spcPts val="1620"/>
+              </a:lnSpc>
+              <a:spcAft>
+                <a:spcPts val="300"/>
+              </a:spcAft>
+              <a:buSzPct val="100000"/>
+              <a:buChar char="•"/>
+            </a:pPr>
+            <a:r>
+              <a:rPr lang="en-US" sz="1200" dirty="0">
+                <a:solidFill>
+                  <a:srgbClr val="1C2833"/>
+                </a:solidFill>
+                <a:latin typeface="Arial" pitchFamily="34" charset="0"/>
+                <a:ea typeface="Arial" pitchFamily="34" charset="-122"/>
+                <a:cs typeface="Arial" pitchFamily="34" charset="-120"/>
+              </a:rPr>
+              <a:t>Take questions.</a:t>
             </a:r>
             <a:endParaRPr lang="en-US" sz="1200" dirty="0"/>
           </a:p>
@@ -3451,7 +3445,7 @@
                 <a:ea typeface="Georgia" pitchFamily="34" charset="-122"/>
                 <a:cs typeface="Georgia" pitchFamily="34" charset="-120"/>
               </a:rPr>
-              <a:t>Differentiation</a:t>
+              <a:t>Wrap-up (2 min)</a:t>
             </a:r>
             <a:endParaRPr lang="en-US" sz="1800" dirty="0"/>
           </a:p>
@@ -3466,7 +3460,7 @@
         <p:spPr>
           <a:xfrm>
             <a:off x="634901" y="883593"/>
-            <a:ext cx="8102798" cy="731341"/>
+            <a:ext cx="8102798" cy="750391"/>
           </a:xfrm>
           <a:prstGeom prst="rect">
             <a:avLst/>
@@ -3489,15 +3483,15 @@
               <a:buChar char="•"/>
             </a:pPr>
             <a:r>
-              <a:rPr lang="en-US" sz="1200" b="1" dirty="0">
-                <a:solidFill>
-                  <a:srgbClr val="1C2833"/>
-                </a:solidFill>
-                <a:latin typeface="Arial" pitchFamily="34" charset="0"/>
-                <a:ea typeface="Arial" pitchFamily="34" charset="-122"/>
-                <a:cs typeface="Arial" pitchFamily="34" charset="-120"/>
-              </a:rPr>
-              <a:t>Tier up:</a:t>
+              <a:rPr lang="en-US" sz="1200" dirty="0">
+                <a:solidFill>
+                  <a:srgbClr val="1C2833"/>
+                </a:solidFill>
+                <a:latin typeface="Arial" pitchFamily="34" charset="0"/>
+                <a:ea typeface="Arial" pitchFamily="34" charset="-122"/>
+                <a:cs typeface="Arial" pitchFamily="34" charset="-120"/>
+              </a:rPr>
+              <a:t>Project choice form due tomorrow. Three options: shopkeeper chart, teaching video, two's-complement poster. (See </a:t>
             </a:r>
             <a:pPr algn="l" indent="0" marL="0">
               <a:lnSpc>
@@ -3517,7 +3511,27 @@
                 <a:ea typeface="Arial" pitchFamily="34" charset="-122"/>
                 <a:cs typeface="Arial" pitchFamily="34" charset="-120"/>
               </a:rPr>
-              <a:t> Try mixed-base, mixed-method speed test: 6 problems in 60 seconds. Use Nikhilam where helpful, standard where not.</a:t>
+              <a:t>assessments/project-brief.md</a:t>
+            </a:r>
+            <a:pPr algn="l" indent="0" marL="0">
+              <a:lnSpc>
+                <a:spcPts val="1620"/>
+              </a:lnSpc>
+              <a:spcAft>
+                <a:spcPts val="300"/>
+              </a:spcAft>
+              <a:buNone/>
+            </a:pPr>
+            <a:r>
+              <a:rPr lang="en-US" sz="1200" dirty="0">
+                <a:solidFill>
+                  <a:srgbClr val="1C2833"/>
+                </a:solidFill>
+                <a:latin typeface="Arial" pitchFamily="34" charset="0"/>
+                <a:ea typeface="Arial" pitchFamily="34" charset="-122"/>
+                <a:cs typeface="Arial" pitchFamily="34" charset="-120"/>
+              </a:rPr>
+              <a:t>.)</a:t>
             </a:r>
             <a:endParaRPr lang="en-US" sz="1200" dirty="0"/>
           </a:p>
@@ -3533,15 +3547,15 @@
               <a:buChar char="•"/>
             </a:pPr>
             <a:r>
-              <a:rPr lang="en-US" sz="1200" b="1" dirty="0">
-                <a:solidFill>
-                  <a:srgbClr val="1C2833"/>
-                </a:solidFill>
-                <a:latin typeface="Arial" pitchFamily="34" charset="0"/>
-                <a:ea typeface="Arial" pitchFamily="34" charset="-122"/>
-                <a:cs typeface="Arial" pitchFamily="34" charset="-120"/>
-              </a:rPr>
-              <a:t>Tier down:</a:t>
+              <a:rPr lang="en-US" sz="1200" dirty="0">
+                <a:solidFill>
+                  <a:srgbClr val="1C2833"/>
+                </a:solidFill>
+                <a:latin typeface="Arial" pitchFamily="34" charset="0"/>
+                <a:ea typeface="Arial" pitchFamily="34" charset="-122"/>
+                <a:cs typeface="Arial" pitchFamily="34" charset="-120"/>
+              </a:rPr>
+              <a:t>Preview Day 6: </a:t>
             </a:r>
             <a:pPr algn="l" indent="0" marL="0">
               <a:lnSpc>
@@ -3553,15 +3567,15 @@
               <a:buNone/>
             </a:pPr>
             <a:r>
-              <a:rPr lang="en-US" sz="1200" dirty="0">
-                <a:solidFill>
-                  <a:srgbClr val="1C2833"/>
-                </a:solidFill>
-                <a:latin typeface="Arial" pitchFamily="34" charset="0"/>
-                <a:ea typeface="Arial" pitchFamily="34" charset="-122"/>
-                <a:cs typeface="Arial" pitchFamily="34" charset="-120"/>
-              </a:rPr>
-              <a:t> Re-do the Day 4 worksheet. Don't take the quiz cold.</a:t>
+              <a:rPr lang="en-US" sz="1200" i="1" dirty="0">
+                <a:solidFill>
+                  <a:srgbClr val="1C2833"/>
+                </a:solidFill>
+                <a:latin typeface="Arial" pitchFamily="34" charset="0"/>
+                <a:ea typeface="Arial" pitchFamily="34" charset="-122"/>
+                <a:cs typeface="Arial" pitchFamily="34" charset="-120"/>
+              </a:rPr>
+              <a:t>"Why does this work? Tomorrow we prove it — with algebra."</a:t>
             </a:r>
             <a:endParaRPr lang="en-US" sz="1200" dirty="0"/>
           </a:p>
@@ -3719,7 +3733,7 @@
                 <a:ea typeface="Georgia" pitchFamily="34" charset="-122"/>
                 <a:cs typeface="Georgia" pitchFamily="34" charset="-120"/>
               </a:rPr>
-              <a:t>Teacher notes</a:t>
+              <a:t>Student-facing content</a:t>
             </a:r>
             <a:endParaRPr lang="en-US" sz="1800" dirty="0"/>
           </a:p>
@@ -3733,8 +3747,61 @@
         </p:nvSpPr>
         <p:spPr>
           <a:xfrm>
-            <a:off x="406301" y="870942"/>
-            <a:ext cx="8498026" cy="853083"/>
+            <a:off x="406301" y="883593"/>
+            <a:ext cx="8331398" cy="2226469"/>
+          </a:xfrm>
+          <a:prstGeom prst="rect">
+            <a:avLst/>
+          </a:prstGeom>
+          <a:solidFill>
+            <a:srgbClr val="F4F8F9"/>
+          </a:solidFill>
+          <a:ln/>
+        </p:spPr>
+        <p:txBody>
+          <a:bodyPr wrap="square" rtlCol="0" anchor="ctr"/>
+          <a:lstStyle/>
+          <a:p>
+            <a:pPr indent="0" marL="0">
+              <a:buNone/>
+            </a:pPr>
+            <a:endParaRPr lang="en-US" dirty="0"/>
+          </a:p>
+        </p:txBody>
+      </p:sp>
+      <p:sp>
+        <p:nvSpPr>
+          <p:cNvPr id="5" name="Shape 3"/>
+          <p:cNvSpPr/>
+          <p:nvPr/>
+        </p:nvSpPr>
+        <p:spPr>
+          <a:xfrm>
+            <a:off x="434876" y="883593"/>
+            <a:ext cx="0" cy="2226469"/>
+          </a:xfrm>
+          <a:prstGeom prst="line">
+            <a:avLst/>
+          </a:prstGeom>
+          <a:noFill/>
+          <a:ln w="57150">
+            <a:solidFill>
+              <a:srgbClr val="FE4447"/>
+            </a:solidFill>
+            <a:prstDash val="solid"/>
+          </a:ln>
+        </p:spPr>
+      </p:sp>
+      <p:sp>
+        <p:nvSpPr>
+          <p:cNvPr id="6" name="Text 4"/>
+          <p:cNvSpPr/>
+          <p:nvPr/>
+        </p:nvSpPr>
+        <p:spPr>
+          <a:xfrm>
+            <a:off x="692051" y="1074093"/>
+            <a:ext cx="7973389" cy="230981"/>
           </a:xfrm>
           <a:prstGeom prst="rect">
             <a:avLst/>
@@ -3748,7 +3815,7 @@
           <a:p>
             <a:pPr algn="l" indent="0" marL="0">
               <a:lnSpc>
-                <a:spcPts val="1680"/>
+                <a:spcPts val="1820"/>
               </a:lnSpc>
               <a:spcBef>
                 <a:spcPts val="300"/>
@@ -3759,19 +3826,44 @@
               <a:buNone/>
             </a:pPr>
             <a:r>
-              <a:rPr lang="en-US" sz="1200" dirty="0">
-                <a:solidFill>
-                  <a:srgbClr val="1C2833"/>
-                </a:solidFill>
-                <a:latin typeface="Arial" pitchFamily="34" charset="0"/>
-                <a:ea typeface="Arial" pitchFamily="34" charset="-122"/>
-                <a:cs typeface="Arial" pitchFamily="34" charset="-120"/>
-              </a:rPr>
-              <a:t>– The retest is the emotional pivot of the module. Most students will see a real improvement; honor it without overselling. ("You're 50% faster — and you're still getting faster.") – Use the formative quiz to triage: anyone scoring below 60% gets a 10-min pull-aside on Day 7 before the two's-complement lesson. Don't let them carry a foundational gap into the harder material. – Distinguish: this is a </a:t>
-            </a:r>
-            <a:pPr algn="l" indent="0" marL="0">
-              <a:lnSpc>
-                <a:spcPts val="1680"/>
+              <a:rPr lang="en-US" sz="1300" b="1" i="1" dirty="0">
+                <a:solidFill>
+                  <a:srgbClr val="1C2833"/>
+                </a:solidFill>
+                <a:latin typeface="Georgia" pitchFamily="34" charset="0"/>
+                <a:ea typeface="Georgia" pitchFamily="34" charset="-122"/>
+                <a:cs typeface="Georgia" pitchFamily="34" charset="-120"/>
+              </a:rPr>
+              <a:t>Mid-module Check</a:t>
+            </a:r>
+            <a:endParaRPr lang="en-US" sz="1300" dirty="0"/>
+          </a:p>
+        </p:txBody>
+      </p:sp>
+      <p:sp>
+        <p:nvSpPr>
+          <p:cNvPr id="7" name="Text 5"/>
+          <p:cNvSpPr/>
+          <p:nvPr/>
+        </p:nvSpPr>
+        <p:spPr>
+          <a:xfrm>
+            <a:off x="692051" y="1343174"/>
+            <a:ext cx="7973389" cy="230981"/>
+          </a:xfrm>
+          <a:prstGeom prst="rect">
+            <a:avLst/>
+          </a:prstGeom>
+          <a:noFill/>
+          <a:ln/>
+        </p:spPr>
+        <p:txBody>
+          <a:bodyPr wrap="square" lIns="0" tIns="0" rIns="0" bIns="0" rtlCol="0" anchor="t"/>
+          <a:lstStyle/>
+          <a:p>
+            <a:pPr algn="l" indent="0" marL="0">
+              <a:lnSpc>
+                <a:spcPts val="1820"/>
               </a:lnSpc>
               <a:spcBef>
                 <a:spcPts val="300"/>
@@ -3782,19 +3874,44 @@
               <a:buNone/>
             </a:pPr>
             <a:r>
-              <a:rPr lang="en-US" sz="1200" i="1" dirty="0">
-                <a:solidFill>
-                  <a:srgbClr val="1C2833"/>
-                </a:solidFill>
-                <a:latin typeface="Arial" pitchFamily="34" charset="0"/>
-                <a:ea typeface="Arial" pitchFamily="34" charset="-122"/>
-                <a:cs typeface="Arial" pitchFamily="34" charset="-120"/>
-              </a:rPr>
-              <a:t>formative</a:t>
-            </a:r>
-            <a:pPr algn="l" indent="0" marL="0">
-              <a:lnSpc>
-                <a:spcPts val="1680"/>
+              <a:rPr lang="en-US" sz="1300" i="1" dirty="0">
+                <a:solidFill>
+                  <a:srgbClr val="1C2833"/>
+                </a:solidFill>
+                <a:latin typeface="Georgia" pitchFamily="34" charset="0"/>
+                <a:ea typeface="Georgia" pitchFamily="34" charset="-122"/>
+                <a:cs typeface="Georgia" pitchFamily="34" charset="-120"/>
+              </a:rPr>
+              <a:t>Day 1 time: ____ sec → Day 5 time: ____ sec → % change: ____</a:t>
+            </a:r>
+            <a:endParaRPr lang="en-US" sz="1300" dirty="0"/>
+          </a:p>
+        </p:txBody>
+      </p:sp>
+      <p:sp>
+        <p:nvSpPr>
+          <p:cNvPr id="8" name="Text 6"/>
+          <p:cNvSpPr/>
+          <p:nvPr/>
+        </p:nvSpPr>
+        <p:spPr>
+          <a:xfrm>
+            <a:off x="692051" y="1612255"/>
+            <a:ext cx="7973389" cy="230981"/>
+          </a:xfrm>
+          <a:prstGeom prst="rect">
+            <a:avLst/>
+          </a:prstGeom>
+          <a:noFill/>
+          <a:ln/>
+        </p:spPr>
+        <p:txBody>
+          <a:bodyPr wrap="square" lIns="0" tIns="0" rIns="0" bIns="0" rtlCol="0" anchor="t"/>
+          <a:lstStyle/>
+          <a:p>
+            <a:pPr algn="l" indent="0" marL="0">
+              <a:lnSpc>
+                <a:spcPts val="1820"/>
               </a:lnSpc>
               <a:spcBef>
                 <a:spcPts val="300"/>
@@ -3805,23 +3922,215 @@
               <a:buNone/>
             </a:pPr>
             <a:r>
-              <a:rPr lang="en-US" sz="1200" dirty="0">
-                <a:solidFill>
-                  <a:srgbClr val="1C2833"/>
-                </a:solidFill>
-                <a:latin typeface="Arial" pitchFamily="34" charset="0"/>
-                <a:ea typeface="Arial" pitchFamily="34" charset="-122"/>
-                <a:cs typeface="Arial" pitchFamily="34" charset="-120"/>
-              </a:rPr>
-              <a:t> check, not summative. No grade weight. Day 10 is summative.</a:t>
-            </a:r>
-            <a:endParaRPr lang="en-US" sz="1200" dirty="0"/>
-          </a:p>
-        </p:txBody>
-      </p:sp>
-      <p:sp>
-        <p:nvSpPr>
-          <p:cNvPr id="5" name="Text 3"/>
+              <a:rPr lang="en-US" sz="1300" i="1" dirty="0">
+                <a:solidFill>
+                  <a:srgbClr val="1C2833"/>
+                </a:solidFill>
+                <a:latin typeface="Georgia" pitchFamily="34" charset="0"/>
+                <a:ea typeface="Georgia" pitchFamily="34" charset="-122"/>
+                <a:cs typeface="Georgia" pitchFamily="34" charset="-120"/>
+              </a:rPr>
+              <a:t>If you improved less than expected, the most common reason is one of three things:</a:t>
+            </a:r>
+            <a:endParaRPr lang="en-US" sz="1300" dirty="0"/>
+          </a:p>
+        </p:txBody>
+      </p:sp>
+      <p:sp>
+        <p:nvSpPr>
+          <p:cNvPr id="9" name="Text 7"/>
+          <p:cNvSpPr/>
+          <p:nvPr/>
+        </p:nvSpPr>
+        <p:spPr>
+          <a:xfrm>
+            <a:off x="692051" y="1881336"/>
+            <a:ext cx="7973389" cy="230981"/>
+          </a:xfrm>
+          <a:prstGeom prst="rect">
+            <a:avLst/>
+          </a:prstGeom>
+          <a:noFill/>
+          <a:ln/>
+        </p:spPr>
+        <p:txBody>
+          <a:bodyPr wrap="square" lIns="0" tIns="0" rIns="0" bIns="0" rtlCol="0" anchor="t"/>
+          <a:lstStyle/>
+          <a:p>
+            <a:pPr algn="l" indent="0" marL="0">
+              <a:lnSpc>
+                <a:spcPts val="1820"/>
+              </a:lnSpc>
+              <a:spcBef>
+                <a:spcPts val="300"/>
+              </a:spcBef>
+              <a:spcAft>
+                <a:spcPts val="300"/>
+              </a:spcAft>
+              <a:buNone/>
+            </a:pPr>
+            <a:r>
+              <a:rPr lang="en-US" sz="1300" i="1" dirty="0">
+                <a:solidFill>
+                  <a:srgbClr val="1C2833"/>
+                </a:solidFill>
+                <a:latin typeface="Georgia" pitchFamily="34" charset="0"/>
+                <a:ea typeface="Georgia" pitchFamily="34" charset="-122"/>
+                <a:cs typeface="Georgia" pitchFamily="34" charset="-120"/>
+              </a:rPr>
+              <a:t>Padding error — you forgot leading zeros.</a:t>
+            </a:r>
+            <a:endParaRPr lang="en-US" sz="1300" dirty="0"/>
+          </a:p>
+        </p:txBody>
+      </p:sp>
+      <p:sp>
+        <p:nvSpPr>
+          <p:cNvPr id="10" name="Text 8"/>
+          <p:cNvSpPr/>
+          <p:nvPr/>
+        </p:nvSpPr>
+        <p:spPr>
+          <a:xfrm>
+            <a:off x="692051" y="2150418"/>
+            <a:ext cx="7973389" cy="230981"/>
+          </a:xfrm>
+          <a:prstGeom prst="rect">
+            <a:avLst/>
+          </a:prstGeom>
+          <a:noFill/>
+          <a:ln/>
+        </p:spPr>
+        <p:txBody>
+          <a:bodyPr wrap="square" lIns="0" tIns="0" rIns="0" bIns="0" rtlCol="0" anchor="t"/>
+          <a:lstStyle/>
+          <a:p>
+            <a:pPr algn="l" indent="0" marL="0">
+              <a:lnSpc>
+                <a:spcPts val="1820"/>
+              </a:lnSpc>
+              <a:spcBef>
+                <a:spcPts val="300"/>
+              </a:spcBef>
+              <a:spcAft>
+                <a:spcPts val="300"/>
+              </a:spcAft>
+              <a:buNone/>
+            </a:pPr>
+            <a:r>
+              <a:rPr lang="en-US" sz="1300" i="1" dirty="0">
+                <a:solidFill>
+                  <a:srgbClr val="1C2833"/>
+                </a:solidFill>
+                <a:latin typeface="Georgia" pitchFamily="34" charset="0"/>
+                <a:ea typeface="Georgia" pitchFamily="34" charset="-122"/>
+                <a:cs typeface="Georgia" pitchFamily="34" charset="-120"/>
+              </a:rPr>
+              <a:t>Last-digit error — you used "from 9" for the last digit instead of "from 10."</a:t>
+            </a:r>
+            <a:endParaRPr lang="en-US" sz="1300" dirty="0"/>
+          </a:p>
+        </p:txBody>
+      </p:sp>
+      <p:sp>
+        <p:nvSpPr>
+          <p:cNvPr id="11" name="Text 9"/>
+          <p:cNvSpPr/>
+          <p:nvPr/>
+        </p:nvSpPr>
+        <p:spPr>
+          <a:xfrm>
+            <a:off x="692051" y="2419499"/>
+            <a:ext cx="7973389" cy="230981"/>
+          </a:xfrm>
+          <a:prstGeom prst="rect">
+            <a:avLst/>
+          </a:prstGeom>
+          <a:noFill/>
+          <a:ln/>
+        </p:spPr>
+        <p:txBody>
+          <a:bodyPr wrap="square" lIns="0" tIns="0" rIns="0" bIns="0" rtlCol="0" anchor="t"/>
+          <a:lstStyle/>
+          <a:p>
+            <a:pPr algn="l" indent="0" marL="0">
+              <a:lnSpc>
+                <a:spcPts val="1820"/>
+              </a:lnSpc>
+              <a:spcBef>
+                <a:spcPts val="300"/>
+              </a:spcBef>
+              <a:spcAft>
+                <a:spcPts val="300"/>
+              </a:spcAft>
+              <a:buNone/>
+            </a:pPr>
+            <a:r>
+              <a:rPr lang="en-US" sz="1300" i="1" dirty="0">
+                <a:solidFill>
+                  <a:srgbClr val="1C2833"/>
+                </a:solidFill>
+                <a:latin typeface="Georgia" pitchFamily="34" charset="0"/>
+                <a:ea typeface="Georgia" pitchFamily="34" charset="-122"/>
+                <a:cs typeface="Georgia" pitchFamily="34" charset="-120"/>
+              </a:rPr>
+              <a:t>You're still translating mentally between "borrow" and "complement."</a:t>
+            </a:r>
+            <a:endParaRPr lang="en-US" sz="1300" dirty="0"/>
+          </a:p>
+        </p:txBody>
+      </p:sp>
+      <p:sp>
+        <p:nvSpPr>
+          <p:cNvPr id="12" name="Text 10"/>
+          <p:cNvSpPr/>
+          <p:nvPr/>
+        </p:nvSpPr>
+        <p:spPr>
+          <a:xfrm>
+            <a:off x="692051" y="2688580"/>
+            <a:ext cx="7973389" cy="230981"/>
+          </a:xfrm>
+          <a:prstGeom prst="rect">
+            <a:avLst/>
+          </a:prstGeom>
+          <a:noFill/>
+          <a:ln/>
+        </p:spPr>
+        <p:txBody>
+          <a:bodyPr wrap="square" lIns="0" tIns="0" rIns="0" bIns="0" rtlCol="0" anchor="t"/>
+          <a:lstStyle/>
+          <a:p>
+            <a:pPr algn="l" indent="0" marL="0">
+              <a:lnSpc>
+                <a:spcPts val="1820"/>
+              </a:lnSpc>
+              <a:spcBef>
+                <a:spcPts val="300"/>
+              </a:spcBef>
+              <a:spcAft>
+                <a:spcPts val="300"/>
+              </a:spcAft>
+              <a:buNone/>
+            </a:pPr>
+            <a:r>
+              <a:rPr lang="en-US" sz="1300" i="1" dirty="0">
+                <a:solidFill>
+                  <a:srgbClr val="1C2833"/>
+                </a:solidFill>
+                <a:latin typeface="Georgia" pitchFamily="34" charset="0"/>
+                <a:ea typeface="Georgia" pitchFamily="34" charset="-122"/>
+                <a:cs typeface="Georgia" pitchFamily="34" charset="-120"/>
+              </a:rPr>
+              <a:t>Don't panic. Days 6–9 fix all three.</a:t>
+            </a:r>
+            <a:endParaRPr lang="en-US" sz="1300" dirty="0"/>
+          </a:p>
+        </p:txBody>
+      </p:sp>
+      <p:sp>
+        <p:nvSpPr>
+          <p:cNvPr id="13" name="Text 11"/>
           <p:cNvSpPr/>
           <p:nvPr/>
         </p:nvSpPr>
@@ -3971,7 +4280,7 @@
                 <a:ea typeface="Georgia" pitchFamily="34" charset="-122"/>
                 <a:cs typeface="Georgia" pitchFamily="34" charset="-120"/>
               </a:rPr>
-              <a:t>Citation(s) used in this lesson</a:t>
+              <a:t>Homework</a:t>
             </a:r>
             <a:endParaRPr lang="en-US" sz="1800" dirty="0"/>
           </a:p>
@@ -3985,8 +4294,8 @@
         </p:nvSpPr>
         <p:spPr>
           <a:xfrm>
-            <a:off x="406301" y="870942"/>
-            <a:ext cx="8498026" cy="213271"/>
+            <a:off x="634901" y="883593"/>
+            <a:ext cx="8102798" cy="769441"/>
           </a:xfrm>
           <a:prstGeom prst="rect">
             <a:avLst/>
@@ -3998,6 +4307,316 @@
           <a:bodyPr wrap="square" lIns="0" tIns="0" rIns="0" bIns="0" rtlCol="0" anchor="t"/>
           <a:lstStyle/>
           <a:p>
+            <a:pPr algn="l" marL="342900" indent="-342900">
+              <a:lnSpc>
+                <a:spcPts val="1620"/>
+              </a:lnSpc>
+              <a:spcAft>
+                <a:spcPts val="300"/>
+              </a:spcAft>
+              <a:buSzPct val="100000"/>
+              <a:buChar char="•"/>
+            </a:pPr>
+            <a:r>
+              <a:rPr lang="en-US" sz="1200" dirty="0">
+                <a:solidFill>
+                  <a:srgbClr val="1C2833"/>
+                </a:solidFill>
+                <a:latin typeface="Arial" pitchFamily="34" charset="0"/>
+                <a:ea typeface="Arial" pitchFamily="34" charset="-122"/>
+                <a:cs typeface="Arial" pitchFamily="34" charset="-120"/>
+              </a:rPr>
+              <a:t>Choose your project format (shopkeeper chart / video / poster) and write a 3-sentence plan.</a:t>
+            </a:r>
+            <a:endParaRPr lang="en-US" sz="1200" dirty="0"/>
+          </a:p>
+          <a:p>
+            <a:pPr algn="l" marL="342900" indent="-342900">
+              <a:lnSpc>
+                <a:spcPts val="1620"/>
+              </a:lnSpc>
+              <a:spcAft>
+                <a:spcPts val="300"/>
+              </a:spcAft>
+              <a:buSzPct val="100000"/>
+              <a:buChar char="•"/>
+            </a:pPr>
+            <a:r>
+              <a:rPr lang="en-US" sz="1200" dirty="0">
+                <a:solidFill>
+                  <a:srgbClr val="1C2833"/>
+                </a:solidFill>
+                <a:latin typeface="Arial" pitchFamily="34" charset="0"/>
+                <a:ea typeface="Arial" pitchFamily="34" charset="-122"/>
+                <a:cs typeface="Arial" pitchFamily="34" charset="-120"/>
+              </a:rPr>
+              <a:t>5 mixed Nikhilam subtractions: </a:t>
+            </a:r>
+            <a:pPr algn="l" indent="0" marL="0">
+              <a:lnSpc>
+                <a:spcPts val="1620"/>
+              </a:lnSpc>
+              <a:spcAft>
+                <a:spcPts val="300"/>
+              </a:spcAft>
+              <a:buNone/>
+            </a:pPr>
+            <a:r>
+              <a:rPr lang="en-US" sz="1200" dirty="0">
+                <a:solidFill>
+                  <a:srgbClr val="1C2833"/>
+                </a:solidFill>
+                <a:latin typeface="Arial" pitchFamily="34" charset="0"/>
+                <a:ea typeface="Arial" pitchFamily="34" charset="-122"/>
+                <a:cs typeface="Arial" pitchFamily="34" charset="-120"/>
+              </a:rPr>
+              <a:t>1000 − 358</a:t>
+            </a:r>
+            <a:pPr algn="l" indent="0" marL="0">
+              <a:lnSpc>
+                <a:spcPts val="1620"/>
+              </a:lnSpc>
+              <a:spcAft>
+                <a:spcPts val="300"/>
+              </a:spcAft>
+              <a:buNone/>
+            </a:pPr>
+            <a:r>
+              <a:rPr lang="en-US" sz="1200" dirty="0">
+                <a:solidFill>
+                  <a:srgbClr val="1C2833"/>
+                </a:solidFill>
+                <a:latin typeface="Arial" pitchFamily="34" charset="0"/>
+                <a:ea typeface="Arial" pitchFamily="34" charset="-122"/>
+                <a:cs typeface="Arial" pitchFamily="34" charset="-120"/>
+              </a:rPr>
+              <a:t>, </a:t>
+            </a:r>
+            <a:pPr algn="l" indent="0" marL="0">
+              <a:lnSpc>
+                <a:spcPts val="1620"/>
+              </a:lnSpc>
+              <a:spcAft>
+                <a:spcPts val="300"/>
+              </a:spcAft>
+              <a:buNone/>
+            </a:pPr>
+            <a:r>
+              <a:rPr lang="en-US" sz="1200" dirty="0">
+                <a:solidFill>
+                  <a:srgbClr val="1C2833"/>
+                </a:solidFill>
+                <a:latin typeface="Arial" pitchFamily="34" charset="0"/>
+                <a:ea typeface="Arial" pitchFamily="34" charset="-122"/>
+                <a:cs typeface="Arial" pitchFamily="34" charset="-120"/>
+              </a:rPr>
+              <a:t>10 000 − 6427</a:t>
+            </a:r>
+            <a:pPr algn="l" indent="0" marL="0">
+              <a:lnSpc>
+                <a:spcPts val="1620"/>
+              </a:lnSpc>
+              <a:spcAft>
+                <a:spcPts val="300"/>
+              </a:spcAft>
+              <a:buNone/>
+            </a:pPr>
+            <a:r>
+              <a:rPr lang="en-US" sz="1200" dirty="0">
+                <a:solidFill>
+                  <a:srgbClr val="1C2833"/>
+                </a:solidFill>
+                <a:latin typeface="Arial" pitchFamily="34" charset="0"/>
+                <a:ea typeface="Arial" pitchFamily="34" charset="-122"/>
+                <a:cs typeface="Arial" pitchFamily="34" charset="-120"/>
+              </a:rPr>
+              <a:t>, </a:t>
+            </a:r>
+            <a:pPr algn="l" indent="0" marL="0">
+              <a:lnSpc>
+                <a:spcPts val="1620"/>
+              </a:lnSpc>
+              <a:spcAft>
+                <a:spcPts val="300"/>
+              </a:spcAft>
+              <a:buNone/>
+            </a:pPr>
+            <a:r>
+              <a:rPr lang="en-US" sz="1200" dirty="0">
+                <a:solidFill>
+                  <a:srgbClr val="1C2833"/>
+                </a:solidFill>
+                <a:latin typeface="Arial" pitchFamily="34" charset="0"/>
+                <a:ea typeface="Arial" pitchFamily="34" charset="-122"/>
+                <a:cs typeface="Arial" pitchFamily="34" charset="-120"/>
+              </a:rPr>
+              <a:t>1000 − 72</a:t>
+            </a:r>
+            <a:pPr algn="l" indent="0" marL="0">
+              <a:lnSpc>
+                <a:spcPts val="1620"/>
+              </a:lnSpc>
+              <a:spcAft>
+                <a:spcPts val="300"/>
+              </a:spcAft>
+              <a:buNone/>
+            </a:pPr>
+            <a:r>
+              <a:rPr lang="en-US" sz="1200" dirty="0">
+                <a:solidFill>
+                  <a:srgbClr val="1C2833"/>
+                </a:solidFill>
+                <a:latin typeface="Arial" pitchFamily="34" charset="0"/>
+                <a:ea typeface="Arial" pitchFamily="34" charset="-122"/>
+                <a:cs typeface="Arial" pitchFamily="34" charset="-120"/>
+              </a:rPr>
+              <a:t>, </a:t>
+            </a:r>
+            <a:pPr algn="l" indent="0" marL="0">
+              <a:lnSpc>
+                <a:spcPts val="1620"/>
+              </a:lnSpc>
+              <a:spcAft>
+                <a:spcPts val="300"/>
+              </a:spcAft>
+              <a:buNone/>
+            </a:pPr>
+            <a:r>
+              <a:rPr lang="en-US" sz="1200" dirty="0">
+                <a:solidFill>
+                  <a:srgbClr val="1C2833"/>
+                </a:solidFill>
+                <a:latin typeface="Arial" pitchFamily="34" charset="0"/>
+                <a:ea typeface="Arial" pitchFamily="34" charset="-122"/>
+                <a:cs typeface="Arial" pitchFamily="34" charset="-120"/>
+              </a:rPr>
+              <a:t>100 000 − 12 345</a:t>
+            </a:r>
+            <a:pPr algn="l" indent="0" marL="0">
+              <a:lnSpc>
+                <a:spcPts val="1620"/>
+              </a:lnSpc>
+              <a:spcAft>
+                <a:spcPts val="300"/>
+              </a:spcAft>
+              <a:buNone/>
+            </a:pPr>
+            <a:r>
+              <a:rPr lang="en-US" sz="1200" dirty="0">
+                <a:solidFill>
+                  <a:srgbClr val="1C2833"/>
+                </a:solidFill>
+                <a:latin typeface="Arial" pitchFamily="34" charset="0"/>
+                <a:ea typeface="Arial" pitchFamily="34" charset="-122"/>
+                <a:cs typeface="Arial" pitchFamily="34" charset="-120"/>
+              </a:rPr>
+              <a:t>, </a:t>
+            </a:r>
+            <a:pPr algn="l" indent="0" marL="0">
+              <a:lnSpc>
+                <a:spcPts val="1620"/>
+              </a:lnSpc>
+              <a:spcAft>
+                <a:spcPts val="300"/>
+              </a:spcAft>
+              <a:buNone/>
+            </a:pPr>
+            <a:r>
+              <a:rPr lang="en-US" sz="1200" dirty="0">
+                <a:solidFill>
+                  <a:srgbClr val="1C2833"/>
+                </a:solidFill>
+                <a:latin typeface="Arial" pitchFamily="34" charset="0"/>
+                <a:ea typeface="Arial" pitchFamily="34" charset="-122"/>
+                <a:cs typeface="Arial" pitchFamily="34" charset="-120"/>
+              </a:rPr>
+              <a:t>10 000 − 9</a:t>
+            </a:r>
+            <a:pPr algn="l" indent="0" marL="0">
+              <a:lnSpc>
+                <a:spcPts val="1620"/>
+              </a:lnSpc>
+              <a:spcAft>
+                <a:spcPts val="300"/>
+              </a:spcAft>
+              <a:buNone/>
+            </a:pPr>
+            <a:r>
+              <a:rPr lang="en-US" sz="1200" dirty="0">
+                <a:solidFill>
+                  <a:srgbClr val="1C2833"/>
+                </a:solidFill>
+                <a:latin typeface="Arial" pitchFamily="34" charset="0"/>
+                <a:ea typeface="Arial" pitchFamily="34" charset="-122"/>
+                <a:cs typeface="Arial" pitchFamily="34" charset="-120"/>
+              </a:rPr>
+              <a:t>. (Last one is </a:t>
+            </a:r>
+            <a:pPr algn="l" indent="0" marL="0">
+              <a:lnSpc>
+                <a:spcPts val="1620"/>
+              </a:lnSpc>
+              <a:spcAft>
+                <a:spcPts val="300"/>
+              </a:spcAft>
+              <a:buNone/>
+            </a:pPr>
+            <a:r>
+              <a:rPr lang="en-US" sz="1200" dirty="0">
+                <a:solidFill>
+                  <a:srgbClr val="1C2833"/>
+                </a:solidFill>
+                <a:latin typeface="Arial" pitchFamily="34" charset="0"/>
+                <a:ea typeface="Arial" pitchFamily="34" charset="-122"/>
+                <a:cs typeface="Arial" pitchFamily="34" charset="-120"/>
+              </a:rPr>
+              <a:t>9991</a:t>
+            </a:r>
+            <a:pPr algn="l" indent="0" marL="0">
+              <a:lnSpc>
+                <a:spcPts val="1620"/>
+              </a:lnSpc>
+              <a:spcAft>
+                <a:spcPts val="300"/>
+              </a:spcAft>
+              <a:buNone/>
+            </a:pPr>
+            <a:r>
+              <a:rPr lang="en-US" sz="1200" dirty="0">
+                <a:solidFill>
+                  <a:srgbClr val="1C2833"/>
+                </a:solidFill>
+                <a:latin typeface="Arial" pitchFamily="34" charset="0"/>
+                <a:ea typeface="Arial" pitchFamily="34" charset="-122"/>
+                <a:cs typeface="Arial" pitchFamily="34" charset="-120"/>
+              </a:rPr>
+              <a:t>; check the padding!)</a:t>
+            </a:r>
+            <a:endParaRPr lang="en-US" sz="1200" dirty="0"/>
+          </a:p>
+        </p:txBody>
+      </p:sp>
+      <p:sp>
+        <p:nvSpPr>
+          <p:cNvPr id="5" name="Text 3"/>
+          <p:cNvSpPr/>
+          <p:nvPr/>
+        </p:nvSpPr>
+        <p:spPr>
+          <a:xfrm>
+            <a:off x="406301" y="4434929"/>
+            <a:ext cx="8498026" cy="213271"/>
+          </a:xfrm>
+          <a:prstGeom prst="rect">
+            <a:avLst/>
+          </a:prstGeom>
+          <a:noFill/>
+          <a:ln/>
+        </p:spPr>
+        <p:txBody>
+          <a:bodyPr wrap="square" lIns="0" tIns="0" rIns="0" bIns="0" rtlCol="0" anchor="t"/>
+          <a:lstStyle/>
+          <a:p>
             <a:pPr algn="l" indent="0" marL="0">
               <a:lnSpc>
                 <a:spcPts val="1680"/>
@@ -4019,8 +4638,253 @@
                 <a:ea typeface="Arial" pitchFamily="34" charset="-122"/>
                 <a:cs typeface="Arial" pitchFamily="34" charset="-120"/>
               </a:rPr>
-              <a:t>– Tirthaji, </a:t>
-            </a:r>
+              <a:t>Middle ·  · IKS Curriculum</a:t>
+            </a:r>
+            <a:endParaRPr lang="en-US" sz="1200" dirty="0"/>
+          </a:p>
+        </p:txBody>
+      </p:sp>
+    </p:spTree>
+  </p:cSld>
+  <p:clrMapOvr>
+    <a:masterClrMapping/>
+  </p:clrMapOvr>
+</p:sld>
+</file>
+
+<file path=ppt/slides/slide15.xml><?xml version="1.0" encoding="utf-8"?>
+<p:sld xmlns:a="http://schemas.openxmlformats.org/drawingml/2006/main" xmlns:r="http://schemas.openxmlformats.org/officeDocument/2006/relationships" xmlns:p="http://schemas.openxmlformats.org/presentationml/2006/main">
+  <p:cSld name="Slide 15">
+    <p:bg>
+      <p:bgPr>
+        <a:solidFill>
+          <a:srgbClr val="FFFFFF"/>
+        </a:solidFill>
+      </p:bgPr>
+    </p:bg>
+    <p:spTree>
+      <p:nvGrpSpPr>
+        <p:cNvPr id="1" name=""/>
+        <p:cNvGrpSpPr/>
+        <p:nvPr/>
+      </p:nvGrpSpPr>
+      <p:grpSpPr>
+        <a:xfrm>
+          <a:off x="0" y="0"/>
+          <a:ext cx="0" cy="0"/>
+          <a:chOff x="0" y="0"/>
+          <a:chExt cx="0" cy="0"/>
+        </a:xfrm>
+      </p:grpSpPr>
+      <p:sp>
+        <p:nvSpPr>
+          <p:cNvPr id="2" name="Text 0"/>
+          <p:cNvSpPr/>
+          <p:nvPr/>
+        </p:nvSpPr>
+        <p:spPr>
+          <a:xfrm>
+            <a:off x="0" y="0"/>
+            <a:ext cx="9144000" cy="101501"/>
+          </a:xfrm>
+          <a:prstGeom prst="rect">
+            <a:avLst/>
+          </a:prstGeom>
+          <a:solidFill>
+            <a:srgbClr val="277884"/>
+          </a:solidFill>
+          <a:ln/>
+        </p:spPr>
+        <p:txBody>
+          <a:bodyPr wrap="square" rtlCol="0" anchor="ctr"/>
+          <a:lstStyle/>
+          <a:p>
+            <a:pPr indent="0" marL="0">
+              <a:buNone/>
+            </a:pPr>
+            <a:endParaRPr lang="en-US" dirty="0"/>
+          </a:p>
+        </p:txBody>
+      </p:sp>
+      <p:sp>
+        <p:nvSpPr>
+          <p:cNvPr id="3" name="Text 1"/>
+          <p:cNvSpPr/>
+          <p:nvPr/>
+        </p:nvSpPr>
+        <p:spPr>
+          <a:xfrm>
+            <a:off x="406301" y="457051"/>
+            <a:ext cx="8498026" cy="274290"/>
+          </a:xfrm>
+          <a:prstGeom prst="rect">
+            <a:avLst/>
+          </a:prstGeom>
+          <a:noFill/>
+          <a:ln/>
+        </p:spPr>
+        <p:txBody>
+          <a:bodyPr wrap="square" lIns="0" tIns="0" rIns="0" bIns="0" rtlCol="0" anchor="t"/>
+          <a:lstStyle/>
+          <a:p>
+            <a:pPr algn="l" indent="0" marL="0">
+              <a:lnSpc>
+                <a:spcPts val="2160"/>
+              </a:lnSpc>
+              <a:spcBef>
+                <a:spcPts val="600"/>
+              </a:spcBef>
+              <a:spcAft>
+                <a:spcPts val="800"/>
+              </a:spcAft>
+              <a:buNone/>
+            </a:pPr>
+            <a:r>
+              <a:rPr lang="en-US" sz="1800" b="1" dirty="0">
+                <a:solidFill>
+                  <a:srgbClr val="FE4447"/>
+                </a:solidFill>
+                <a:latin typeface="Georgia" pitchFamily="34" charset="0"/>
+                <a:ea typeface="Georgia" pitchFamily="34" charset="-122"/>
+                <a:cs typeface="Georgia" pitchFamily="34" charset="-120"/>
+              </a:rPr>
+              <a:t>Differentiation</a:t>
+            </a:r>
+            <a:endParaRPr lang="en-US" sz="1800" dirty="0"/>
+          </a:p>
+        </p:txBody>
+      </p:sp>
+      <p:sp>
+        <p:nvSpPr>
+          <p:cNvPr id="4" name="Text 2"/>
+          <p:cNvSpPr/>
+          <p:nvPr/>
+        </p:nvSpPr>
+        <p:spPr>
+          <a:xfrm>
+            <a:off x="634901" y="883593"/>
+            <a:ext cx="8102798" cy="731341"/>
+          </a:xfrm>
+          <a:prstGeom prst="rect">
+            <a:avLst/>
+          </a:prstGeom>
+          <a:noFill/>
+          <a:ln/>
+        </p:spPr>
+        <p:txBody>
+          <a:bodyPr wrap="square" lIns="0" tIns="0" rIns="0" bIns="0" rtlCol="0" anchor="t"/>
+          <a:lstStyle/>
+          <a:p>
+            <a:pPr algn="l" marL="342900" indent="-342900">
+              <a:lnSpc>
+                <a:spcPts val="1620"/>
+              </a:lnSpc>
+              <a:spcAft>
+                <a:spcPts val="300"/>
+              </a:spcAft>
+              <a:buSzPct val="100000"/>
+              <a:buChar char="•"/>
+            </a:pPr>
+            <a:r>
+              <a:rPr lang="en-US" sz="1200" b="1" dirty="0">
+                <a:solidFill>
+                  <a:srgbClr val="1C2833"/>
+                </a:solidFill>
+                <a:latin typeface="Arial" pitchFamily="34" charset="0"/>
+                <a:ea typeface="Arial" pitchFamily="34" charset="-122"/>
+                <a:cs typeface="Arial" pitchFamily="34" charset="-120"/>
+              </a:rPr>
+              <a:t>Tier up:</a:t>
+            </a:r>
+            <a:pPr algn="l" indent="0" marL="0">
+              <a:lnSpc>
+                <a:spcPts val="1620"/>
+              </a:lnSpc>
+              <a:spcAft>
+                <a:spcPts val="300"/>
+              </a:spcAft>
+              <a:buNone/>
+            </a:pPr>
+            <a:r>
+              <a:rPr lang="en-US" sz="1200" dirty="0">
+                <a:solidFill>
+                  <a:srgbClr val="1C2833"/>
+                </a:solidFill>
+                <a:latin typeface="Arial" pitchFamily="34" charset="0"/>
+                <a:ea typeface="Arial" pitchFamily="34" charset="-122"/>
+                <a:cs typeface="Arial" pitchFamily="34" charset="-120"/>
+              </a:rPr>
+              <a:t> Try mixed-base, mixed-method speed test: 6 problems in 60 seconds. Use Nikhilam where helpful, standard where not.</a:t>
+            </a:r>
+            <a:endParaRPr lang="en-US" sz="1200" dirty="0"/>
+          </a:p>
+          <a:p>
+            <a:pPr algn="l" marL="342900" indent="-342900">
+              <a:lnSpc>
+                <a:spcPts val="1620"/>
+              </a:lnSpc>
+              <a:spcAft>
+                <a:spcPts val="300"/>
+              </a:spcAft>
+              <a:buSzPct val="100000"/>
+              <a:buChar char="•"/>
+            </a:pPr>
+            <a:r>
+              <a:rPr lang="en-US" sz="1200" b="1" dirty="0">
+                <a:solidFill>
+                  <a:srgbClr val="1C2833"/>
+                </a:solidFill>
+                <a:latin typeface="Arial" pitchFamily="34" charset="0"/>
+                <a:ea typeface="Arial" pitchFamily="34" charset="-122"/>
+                <a:cs typeface="Arial" pitchFamily="34" charset="-120"/>
+              </a:rPr>
+              <a:t>Tier down:</a:t>
+            </a:r>
+            <a:pPr algn="l" indent="0" marL="0">
+              <a:lnSpc>
+                <a:spcPts val="1620"/>
+              </a:lnSpc>
+              <a:spcAft>
+                <a:spcPts val="300"/>
+              </a:spcAft>
+              <a:buNone/>
+            </a:pPr>
+            <a:r>
+              <a:rPr lang="en-US" sz="1200" dirty="0">
+                <a:solidFill>
+                  <a:srgbClr val="1C2833"/>
+                </a:solidFill>
+                <a:latin typeface="Arial" pitchFamily="34" charset="0"/>
+                <a:ea typeface="Arial" pitchFamily="34" charset="-122"/>
+                <a:cs typeface="Arial" pitchFamily="34" charset="-120"/>
+              </a:rPr>
+              <a:t> Re-do the Day 4 worksheet. Don't take the quiz cold.</a:t>
+            </a:r>
+            <a:endParaRPr lang="en-US" sz="1200" dirty="0"/>
+          </a:p>
+        </p:txBody>
+      </p:sp>
+      <p:sp>
+        <p:nvSpPr>
+          <p:cNvPr id="5" name="Text 3"/>
+          <p:cNvSpPr/>
+          <p:nvPr/>
+        </p:nvSpPr>
+        <p:spPr>
+          <a:xfrm>
+            <a:off x="406301" y="4434929"/>
+            <a:ext cx="8498026" cy="213271"/>
+          </a:xfrm>
+          <a:prstGeom prst="rect">
+            <a:avLst/>
+          </a:prstGeom>
+          <a:noFill/>
+          <a:ln/>
+        </p:spPr>
+        <p:txBody>
+          <a:bodyPr wrap="square" lIns="0" tIns="0" rIns="0" bIns="0" rtlCol="0" anchor="t"/>
+          <a:lstStyle/>
+          <a:p>
             <a:pPr algn="l" indent="0" marL="0">
               <a:lnSpc>
                 <a:spcPts val="1680"/>
@@ -4034,6 +4898,230 @@
               <a:buNone/>
             </a:pPr>
             <a:r>
+              <a:rPr lang="en-US" sz="1200" dirty="0">
+                <a:solidFill>
+                  <a:srgbClr val="1C2833"/>
+                </a:solidFill>
+                <a:latin typeface="Arial" pitchFamily="34" charset="0"/>
+                <a:ea typeface="Arial" pitchFamily="34" charset="-122"/>
+                <a:cs typeface="Arial" pitchFamily="34" charset="-120"/>
+              </a:rPr>
+              <a:t>Middle ·  · IKS Curriculum</a:t>
+            </a:r>
+            <a:endParaRPr lang="en-US" sz="1200" dirty="0"/>
+          </a:p>
+        </p:txBody>
+      </p:sp>
+    </p:spTree>
+  </p:cSld>
+  <p:clrMapOvr>
+    <a:masterClrMapping/>
+  </p:clrMapOvr>
+</p:sld>
+</file>
+
+<file path=ppt/slides/slide16.xml><?xml version="1.0" encoding="utf-8"?>
+<p:sld xmlns:a="http://schemas.openxmlformats.org/drawingml/2006/main" xmlns:r="http://schemas.openxmlformats.org/officeDocument/2006/relationships" xmlns:p="http://schemas.openxmlformats.org/presentationml/2006/main">
+  <p:cSld name="Slide 16">
+    <p:bg>
+      <p:bgPr>
+        <a:solidFill>
+          <a:srgbClr val="FFFFFF"/>
+        </a:solidFill>
+      </p:bgPr>
+    </p:bg>
+    <p:spTree>
+      <p:nvGrpSpPr>
+        <p:cNvPr id="1" name=""/>
+        <p:cNvGrpSpPr/>
+        <p:nvPr/>
+      </p:nvGrpSpPr>
+      <p:grpSpPr>
+        <a:xfrm>
+          <a:off x="0" y="0"/>
+          <a:ext cx="0" cy="0"/>
+          <a:chOff x="0" y="0"/>
+          <a:chExt cx="0" cy="0"/>
+        </a:xfrm>
+      </p:grpSpPr>
+      <p:sp>
+        <p:nvSpPr>
+          <p:cNvPr id="2" name="Text 0"/>
+          <p:cNvSpPr/>
+          <p:nvPr/>
+        </p:nvSpPr>
+        <p:spPr>
+          <a:xfrm>
+            <a:off x="0" y="0"/>
+            <a:ext cx="9144000" cy="101501"/>
+          </a:xfrm>
+          <a:prstGeom prst="rect">
+            <a:avLst/>
+          </a:prstGeom>
+          <a:solidFill>
+            <a:srgbClr val="277884"/>
+          </a:solidFill>
+          <a:ln/>
+        </p:spPr>
+        <p:txBody>
+          <a:bodyPr wrap="square" rtlCol="0" anchor="ctr"/>
+          <a:lstStyle/>
+          <a:p>
+            <a:pPr indent="0" marL="0">
+              <a:buNone/>
+            </a:pPr>
+            <a:endParaRPr lang="en-US" dirty="0"/>
+          </a:p>
+        </p:txBody>
+      </p:sp>
+      <p:sp>
+        <p:nvSpPr>
+          <p:cNvPr id="3" name="Text 1"/>
+          <p:cNvSpPr/>
+          <p:nvPr/>
+        </p:nvSpPr>
+        <p:spPr>
+          <a:xfrm>
+            <a:off x="406301" y="457051"/>
+            <a:ext cx="8498026" cy="274290"/>
+          </a:xfrm>
+          <a:prstGeom prst="rect">
+            <a:avLst/>
+          </a:prstGeom>
+          <a:noFill/>
+          <a:ln/>
+        </p:spPr>
+        <p:txBody>
+          <a:bodyPr wrap="square" lIns="0" tIns="0" rIns="0" bIns="0" rtlCol="0" anchor="t"/>
+          <a:lstStyle/>
+          <a:p>
+            <a:pPr algn="l" indent="0" marL="0">
+              <a:lnSpc>
+                <a:spcPts val="2160"/>
+              </a:lnSpc>
+              <a:spcBef>
+                <a:spcPts val="600"/>
+              </a:spcBef>
+              <a:spcAft>
+                <a:spcPts val="800"/>
+              </a:spcAft>
+              <a:buNone/>
+            </a:pPr>
+            <a:r>
+              <a:rPr lang="en-US" sz="1800" b="1" dirty="0">
+                <a:solidFill>
+                  <a:srgbClr val="FE4447"/>
+                </a:solidFill>
+                <a:latin typeface="Georgia" pitchFamily="34" charset="0"/>
+                <a:ea typeface="Georgia" pitchFamily="34" charset="-122"/>
+                <a:cs typeface="Georgia" pitchFamily="34" charset="-120"/>
+              </a:rPr>
+              <a:t>Teacher notes</a:t>
+            </a:r>
+            <a:endParaRPr lang="en-US" sz="1800" dirty="0"/>
+          </a:p>
+        </p:txBody>
+      </p:sp>
+      <p:sp>
+        <p:nvSpPr>
+          <p:cNvPr id="4" name="Text 2"/>
+          <p:cNvSpPr/>
+          <p:nvPr/>
+        </p:nvSpPr>
+        <p:spPr>
+          <a:xfrm>
+            <a:off x="634901" y="883593"/>
+            <a:ext cx="8102798" cy="1180802"/>
+          </a:xfrm>
+          <a:prstGeom prst="rect">
+            <a:avLst/>
+          </a:prstGeom>
+          <a:noFill/>
+          <a:ln/>
+        </p:spPr>
+        <p:txBody>
+          <a:bodyPr wrap="square" lIns="0" tIns="0" rIns="0" bIns="0" rtlCol="0" anchor="t"/>
+          <a:lstStyle/>
+          <a:p>
+            <a:pPr algn="l" marL="342900" indent="-342900">
+              <a:lnSpc>
+                <a:spcPts val="1620"/>
+              </a:lnSpc>
+              <a:spcAft>
+                <a:spcPts val="300"/>
+              </a:spcAft>
+              <a:buSzPct val="100000"/>
+              <a:buChar char="•"/>
+            </a:pPr>
+            <a:r>
+              <a:rPr lang="en-US" sz="1200" dirty="0">
+                <a:solidFill>
+                  <a:srgbClr val="1C2833"/>
+                </a:solidFill>
+                <a:latin typeface="Arial" pitchFamily="34" charset="0"/>
+                <a:ea typeface="Arial" pitchFamily="34" charset="-122"/>
+                <a:cs typeface="Arial" pitchFamily="34" charset="-120"/>
+              </a:rPr>
+              <a:t>The retest is the emotional pivot of the module. Most students will see a real improvement; honor it without overselling. ("You're 50% faster — and you're still getting faster.")</a:t>
+            </a:r>
+            <a:endParaRPr lang="en-US" sz="1200" dirty="0"/>
+          </a:p>
+          <a:p>
+            <a:pPr algn="l" marL="342900" indent="-342900">
+              <a:lnSpc>
+                <a:spcPts val="1620"/>
+              </a:lnSpc>
+              <a:spcAft>
+                <a:spcPts val="300"/>
+              </a:spcAft>
+              <a:buSzPct val="100000"/>
+              <a:buChar char="•"/>
+            </a:pPr>
+            <a:r>
+              <a:rPr lang="en-US" sz="1200" dirty="0">
+                <a:solidFill>
+                  <a:srgbClr val="1C2833"/>
+                </a:solidFill>
+                <a:latin typeface="Arial" pitchFamily="34" charset="0"/>
+                <a:ea typeface="Arial" pitchFamily="34" charset="-122"/>
+                <a:cs typeface="Arial" pitchFamily="34" charset="-120"/>
+              </a:rPr>
+              <a:t>Use the formative quiz to triage: anyone scoring below 60% gets a 10-min pull-aside on Day 7 before the two's-complement lesson. Don't let them carry a foundational gap into the harder material.</a:t>
+            </a:r>
+            <a:endParaRPr lang="en-US" sz="1200" dirty="0"/>
+          </a:p>
+          <a:p>
+            <a:pPr algn="l" marL="342900" indent="-342900">
+              <a:lnSpc>
+                <a:spcPts val="1620"/>
+              </a:lnSpc>
+              <a:spcAft>
+                <a:spcPts val="300"/>
+              </a:spcAft>
+              <a:buSzPct val="100000"/>
+              <a:buChar char="•"/>
+            </a:pPr>
+            <a:r>
+              <a:rPr lang="en-US" sz="1200" dirty="0">
+                <a:solidFill>
+                  <a:srgbClr val="1C2833"/>
+                </a:solidFill>
+                <a:latin typeface="Arial" pitchFamily="34" charset="0"/>
+                <a:ea typeface="Arial" pitchFamily="34" charset="-122"/>
+                <a:cs typeface="Arial" pitchFamily="34" charset="-120"/>
+              </a:rPr>
+              <a:t>Distinguish: this is a </a:t>
+            </a:r>
+            <a:pPr algn="l" indent="0" marL="0">
+              <a:lnSpc>
+                <a:spcPts val="1620"/>
+              </a:lnSpc>
+              <a:spcAft>
+                <a:spcPts val="300"/>
+              </a:spcAft>
+              <a:buNone/>
+            </a:pPr>
+            <a:r>
               <a:rPr lang="en-US" sz="1200" i="1" dirty="0">
                 <a:solidFill>
                   <a:srgbClr val="1C2833"/>
@@ -4042,15 +5130,256 @@
                 <a:ea typeface="Arial" pitchFamily="34" charset="-122"/>
                 <a:cs typeface="Arial" pitchFamily="34" charset="-120"/>
               </a:rPr>
+              <a:t>formative</a:t>
+            </a:r>
+            <a:pPr algn="l" indent="0" marL="0">
+              <a:lnSpc>
+                <a:spcPts val="1620"/>
+              </a:lnSpc>
+              <a:spcAft>
+                <a:spcPts val="300"/>
+              </a:spcAft>
+              <a:buNone/>
+            </a:pPr>
+            <a:r>
+              <a:rPr lang="en-US" sz="1200" dirty="0">
+                <a:solidFill>
+                  <a:srgbClr val="1C2833"/>
+                </a:solidFill>
+                <a:latin typeface="Arial" pitchFamily="34" charset="0"/>
+                <a:ea typeface="Arial" pitchFamily="34" charset="-122"/>
+                <a:cs typeface="Arial" pitchFamily="34" charset="-120"/>
+              </a:rPr>
+              <a:t> check, not summative. No grade weight. Day 10 is summative.</a:t>
+            </a:r>
+            <a:endParaRPr lang="en-US" sz="1200" dirty="0"/>
+          </a:p>
+        </p:txBody>
+      </p:sp>
+      <p:sp>
+        <p:nvSpPr>
+          <p:cNvPr id="5" name="Text 3"/>
+          <p:cNvSpPr/>
+          <p:nvPr/>
+        </p:nvSpPr>
+        <p:spPr>
+          <a:xfrm>
+            <a:off x="406301" y="4434929"/>
+            <a:ext cx="8498026" cy="213271"/>
+          </a:xfrm>
+          <a:prstGeom prst="rect">
+            <a:avLst/>
+          </a:prstGeom>
+          <a:noFill/>
+          <a:ln/>
+        </p:spPr>
+        <p:txBody>
+          <a:bodyPr wrap="square" lIns="0" tIns="0" rIns="0" bIns="0" rtlCol="0" anchor="t"/>
+          <a:lstStyle/>
+          <a:p>
+            <a:pPr algn="l" indent="0" marL="0">
+              <a:lnSpc>
+                <a:spcPts val="1680"/>
+              </a:lnSpc>
+              <a:spcBef>
+                <a:spcPts val="300"/>
+              </a:spcBef>
+              <a:spcAft>
+                <a:spcPts val="300"/>
+              </a:spcAft>
+              <a:buNone/>
+            </a:pPr>
+            <a:r>
+              <a:rPr lang="en-US" sz="1200" dirty="0">
+                <a:solidFill>
+                  <a:srgbClr val="1C2833"/>
+                </a:solidFill>
+                <a:latin typeface="Arial" pitchFamily="34" charset="0"/>
+                <a:ea typeface="Arial" pitchFamily="34" charset="-122"/>
+                <a:cs typeface="Arial" pitchFamily="34" charset="-120"/>
+              </a:rPr>
+              <a:t>Middle ·  · IKS Curriculum</a:t>
+            </a:r>
+            <a:endParaRPr lang="en-US" sz="1200" dirty="0"/>
+          </a:p>
+        </p:txBody>
+      </p:sp>
+    </p:spTree>
+  </p:cSld>
+  <p:clrMapOvr>
+    <a:masterClrMapping/>
+  </p:clrMapOvr>
+</p:sld>
+</file>
+
+<file path=ppt/slides/slide17.xml><?xml version="1.0" encoding="utf-8"?>
+<p:sld xmlns:a="http://schemas.openxmlformats.org/drawingml/2006/main" xmlns:r="http://schemas.openxmlformats.org/officeDocument/2006/relationships" xmlns:p="http://schemas.openxmlformats.org/presentationml/2006/main">
+  <p:cSld name="Slide 17">
+    <p:bg>
+      <p:bgPr>
+        <a:solidFill>
+          <a:srgbClr val="FFFFFF"/>
+        </a:solidFill>
+      </p:bgPr>
+    </p:bg>
+    <p:spTree>
+      <p:nvGrpSpPr>
+        <p:cNvPr id="1" name=""/>
+        <p:cNvGrpSpPr/>
+        <p:nvPr/>
+      </p:nvGrpSpPr>
+      <p:grpSpPr>
+        <a:xfrm>
+          <a:off x="0" y="0"/>
+          <a:ext cx="0" cy="0"/>
+          <a:chOff x="0" y="0"/>
+          <a:chExt cx="0" cy="0"/>
+        </a:xfrm>
+      </p:grpSpPr>
+      <p:sp>
+        <p:nvSpPr>
+          <p:cNvPr id="2" name="Text 0"/>
+          <p:cNvSpPr/>
+          <p:nvPr/>
+        </p:nvSpPr>
+        <p:spPr>
+          <a:xfrm>
+            <a:off x="0" y="0"/>
+            <a:ext cx="9144000" cy="101501"/>
+          </a:xfrm>
+          <a:prstGeom prst="rect">
+            <a:avLst/>
+          </a:prstGeom>
+          <a:solidFill>
+            <a:srgbClr val="277884"/>
+          </a:solidFill>
+          <a:ln/>
+        </p:spPr>
+        <p:txBody>
+          <a:bodyPr wrap="square" rtlCol="0" anchor="ctr"/>
+          <a:lstStyle/>
+          <a:p>
+            <a:pPr indent="0" marL="0">
+              <a:buNone/>
+            </a:pPr>
+            <a:endParaRPr lang="en-US" dirty="0"/>
+          </a:p>
+        </p:txBody>
+      </p:sp>
+      <p:sp>
+        <p:nvSpPr>
+          <p:cNvPr id="3" name="Text 1"/>
+          <p:cNvSpPr/>
+          <p:nvPr/>
+        </p:nvSpPr>
+        <p:spPr>
+          <a:xfrm>
+            <a:off x="406301" y="457051"/>
+            <a:ext cx="8498026" cy="274290"/>
+          </a:xfrm>
+          <a:prstGeom prst="rect">
+            <a:avLst/>
+          </a:prstGeom>
+          <a:noFill/>
+          <a:ln/>
+        </p:spPr>
+        <p:txBody>
+          <a:bodyPr wrap="square" lIns="0" tIns="0" rIns="0" bIns="0" rtlCol="0" anchor="t"/>
+          <a:lstStyle/>
+          <a:p>
+            <a:pPr algn="l" indent="0" marL="0">
+              <a:lnSpc>
+                <a:spcPts val="2160"/>
+              </a:lnSpc>
+              <a:spcBef>
+                <a:spcPts val="600"/>
+              </a:spcBef>
+              <a:spcAft>
+                <a:spcPts val="800"/>
+              </a:spcAft>
+              <a:buNone/>
+            </a:pPr>
+            <a:r>
+              <a:rPr lang="en-US" sz="1800" b="1" dirty="0">
+                <a:solidFill>
+                  <a:srgbClr val="FE4447"/>
+                </a:solidFill>
+                <a:latin typeface="Georgia" pitchFamily="34" charset="0"/>
+                <a:ea typeface="Georgia" pitchFamily="34" charset="-122"/>
+                <a:cs typeface="Georgia" pitchFamily="34" charset="-120"/>
+              </a:rPr>
+              <a:t>Citation(s) used in this lesson</a:t>
+            </a:r>
+            <a:endParaRPr lang="en-US" sz="1800" dirty="0"/>
+          </a:p>
+        </p:txBody>
+      </p:sp>
+      <p:sp>
+        <p:nvSpPr>
+          <p:cNvPr id="4" name="Text 2"/>
+          <p:cNvSpPr/>
+          <p:nvPr/>
+        </p:nvSpPr>
+        <p:spPr>
+          <a:xfrm>
+            <a:off x="634901" y="883593"/>
+            <a:ext cx="8102798" cy="281880"/>
+          </a:xfrm>
+          <a:prstGeom prst="rect">
+            <a:avLst/>
+          </a:prstGeom>
+          <a:noFill/>
+          <a:ln/>
+        </p:spPr>
+        <p:txBody>
+          <a:bodyPr wrap="square" lIns="0" tIns="0" rIns="0" bIns="0" rtlCol="0" anchor="t"/>
+          <a:lstStyle/>
+          <a:p>
+            <a:pPr algn="l" marL="342900" indent="-342900">
+              <a:lnSpc>
+                <a:spcPts val="1620"/>
+              </a:lnSpc>
+              <a:spcAft>
+                <a:spcPts val="300"/>
+              </a:spcAft>
+              <a:buSzPct val="100000"/>
+              <a:buChar char="•"/>
+            </a:pPr>
+            <a:r>
+              <a:rPr lang="en-US" sz="1200" dirty="0">
+                <a:solidFill>
+                  <a:srgbClr val="1C2833"/>
+                </a:solidFill>
+                <a:latin typeface="Arial" pitchFamily="34" charset="0"/>
+                <a:ea typeface="Arial" pitchFamily="34" charset="-122"/>
+                <a:cs typeface="Arial" pitchFamily="34" charset="-120"/>
+              </a:rPr>
+              <a:t>Tirthaji, </a:t>
+            </a:r>
+            <a:pPr algn="l" indent="0" marL="0">
+              <a:lnSpc>
+                <a:spcPts val="1620"/>
+              </a:lnSpc>
+              <a:spcAft>
+                <a:spcPts val="300"/>
+              </a:spcAft>
+              <a:buNone/>
+            </a:pPr>
+            <a:r>
+              <a:rPr lang="en-US" sz="1200" i="1" dirty="0">
+                <a:solidFill>
+                  <a:srgbClr val="1C2833"/>
+                </a:solidFill>
+                <a:latin typeface="Arial" pitchFamily="34" charset="0"/>
+                <a:ea typeface="Arial" pitchFamily="34" charset="-122"/>
+                <a:cs typeface="Arial" pitchFamily="34" charset="-120"/>
+              </a:rPr>
               <a:t>Vedic Mathematics</a:t>
             </a:r>
             <a:pPr algn="l" indent="0" marL="0">
               <a:lnSpc>
-                <a:spcPts val="1680"/>
-              </a:lnSpc>
-              <a:spcBef>
-                <a:spcPts val="300"/>
-              </a:spcBef>
+                <a:spcPts val="1620"/>
+              </a:lnSpc>
               <a:spcAft>
                 <a:spcPts val="300"/>
               </a:spcAft>
@@ -4223,7 +5552,7 @@
                 <a:ea typeface="Georgia" pitchFamily="34" charset="-122"/>
                 <a:cs typeface="Georgia" pitchFamily="34" charset="-120"/>
               </a:rPr>
-              <a:t>Materials</a:t>
+              <a:t>Learning objective</a:t>
             </a:r>
             <a:endParaRPr lang="en-US" sz="1800" dirty="0"/>
           </a:p>
@@ -4238,7 +5567,7 @@
         <p:spPr>
           <a:xfrm>
             <a:off x="406301" y="870942"/>
-            <a:ext cx="8498026" cy="213271"/>
+            <a:ext cx="8498026" cy="426541"/>
           </a:xfrm>
           <a:prstGeom prst="rect">
             <a:avLst/>
@@ -4271,7 +5600,7 @@
                 <a:ea typeface="Arial" pitchFamily="34" charset="-122"/>
                 <a:cs typeface="Arial" pitchFamily="34" charset="-120"/>
               </a:rPr>
-              <a:t>– The Day 1 baseline sheets (returned today) – Fresh paper for the retest</a:t>
+              <a:t>By the end of this lesson, students will retest the Day 1 baseline problem using the Nikhilam method, record the new time, and complete the formative quiz Part B that consolidates Days 1–4.</a:t>
             </a:r>
             <a:endParaRPr lang="en-US" sz="1200" dirty="0"/>
           </a:p>
@@ -4280,120 +5609,6 @@
       <p:sp>
         <p:nvSpPr>
           <p:cNvPr id="5" name="Text 3"/>
-          <p:cNvSpPr/>
-          <p:nvPr/>
-        </p:nvSpPr>
-        <p:spPr>
-          <a:xfrm>
-            <a:off x="634901" y="1173063"/>
-            <a:ext cx="8102798" cy="300930"/>
-          </a:xfrm>
-          <a:prstGeom prst="rect">
-            <a:avLst/>
-          </a:prstGeom>
-          <a:noFill/>
-          <a:ln/>
-        </p:spPr>
-        <p:txBody>
-          <a:bodyPr wrap="square" lIns="0" tIns="0" rIns="0" bIns="0" rtlCol="0" anchor="t"/>
-          <a:lstStyle/>
-          <a:p>
-            <a:pPr algn="l" marL="342900" indent="-342900">
-              <a:lnSpc>
-                <a:spcPts val="1620"/>
-              </a:lnSpc>
-              <a:spcAft>
-                <a:spcPts val="300"/>
-              </a:spcAft>
-              <a:buSzPct val="100000"/>
-              <a:buChar char="•"/>
-            </a:pPr>
-            <a:r>
-              <a:rPr lang="en-US" sz="1200" dirty="0">
-                <a:solidFill>
-                  <a:srgbClr val="1C2833"/>
-                </a:solidFill>
-                <a:latin typeface="Arial" pitchFamily="34" charset="0"/>
-                <a:ea typeface="Arial" pitchFamily="34" charset="-122"/>
-                <a:cs typeface="Arial" pitchFamily="34" charset="-120"/>
-              </a:rPr>
-              <a:t>quizzes/formative.md</a:t>
-            </a:r>
-            <a:pPr algn="l" indent="0" marL="0">
-              <a:lnSpc>
-                <a:spcPts val="1620"/>
-              </a:lnSpc>
-              <a:spcAft>
-                <a:spcPts val="300"/>
-              </a:spcAft>
-              <a:buNone/>
-            </a:pPr>
-            <a:r>
-              <a:rPr lang="en-US" sz="1200" dirty="0">
-                <a:solidFill>
-                  <a:srgbClr val="1C2833"/>
-                </a:solidFill>
-                <a:latin typeface="Arial" pitchFamily="34" charset="0"/>
-                <a:ea typeface="Arial" pitchFamily="34" charset="-122"/>
-                <a:cs typeface="Arial" pitchFamily="34" charset="-120"/>
-              </a:rPr>
-              <a:t> Part B (printed)</a:t>
-            </a:r>
-            <a:endParaRPr lang="en-US" sz="1200" dirty="0"/>
-          </a:p>
-        </p:txBody>
-      </p:sp>
-      <p:sp>
-        <p:nvSpPr>
-          <p:cNvPr id="6" name="Text 4"/>
-          <p:cNvSpPr/>
-          <p:nvPr/>
-        </p:nvSpPr>
-        <p:spPr>
-          <a:xfrm>
-            <a:off x="406301" y="1562844"/>
-            <a:ext cx="8498026" cy="213271"/>
-          </a:xfrm>
-          <a:prstGeom prst="rect">
-            <a:avLst/>
-          </a:prstGeom>
-          <a:noFill/>
-          <a:ln/>
-        </p:spPr>
-        <p:txBody>
-          <a:bodyPr wrap="square" lIns="0" tIns="0" rIns="0" bIns="0" rtlCol="0" anchor="t"/>
-          <a:lstStyle/>
-          <a:p>
-            <a:pPr algn="l" indent="0" marL="0">
-              <a:lnSpc>
-                <a:spcPts val="1680"/>
-              </a:lnSpc>
-              <a:spcBef>
-                <a:spcPts val="300"/>
-              </a:spcBef>
-              <a:spcAft>
-                <a:spcPts val="300"/>
-              </a:spcAft>
-              <a:buNone/>
-            </a:pPr>
-            <a:r>
-              <a:rPr lang="en-US" sz="1200" dirty="0">
-                <a:solidFill>
-                  <a:srgbClr val="1C2833"/>
-                </a:solidFill>
-                <a:latin typeface="Arial" pitchFamily="34" charset="0"/>
-                <a:ea typeface="Arial" pitchFamily="34" charset="-122"/>
-                <a:cs typeface="Arial" pitchFamily="34" charset="-120"/>
-              </a:rPr>
-              <a:t>– Stopwatch</a:t>
-            </a:r>
-            <a:endParaRPr lang="en-US" sz="1200" dirty="0"/>
-          </a:p>
-        </p:txBody>
-      </p:sp>
-      <p:sp>
-        <p:nvSpPr>
-          <p:cNvPr id="7" name="Text 5"/>
           <p:cNvSpPr/>
           <p:nvPr/>
         </p:nvSpPr>
@@ -4543,7 +5758,7 @@
                 <a:ea typeface="Georgia" pitchFamily="34" charset="-122"/>
                 <a:cs typeface="Georgia" pitchFamily="34" charset="-120"/>
               </a:rPr>
-              <a:t>Lesson flow</a:t>
+              <a:t>Materials</a:t>
             </a:r>
             <a:endParaRPr lang="en-US" sz="1800" dirty="0"/>
           </a:p>
@@ -4552,6 +5767,144 @@
       <p:sp>
         <p:nvSpPr>
           <p:cNvPr id="4" name="Text 2"/>
+          <p:cNvSpPr/>
+          <p:nvPr/>
+        </p:nvSpPr>
+        <p:spPr>
+          <a:xfrm>
+            <a:off x="634901" y="883593"/>
+            <a:ext cx="8102798" cy="1032272"/>
+          </a:xfrm>
+          <a:prstGeom prst="rect">
+            <a:avLst/>
+          </a:prstGeom>
+          <a:noFill/>
+          <a:ln/>
+        </p:spPr>
+        <p:txBody>
+          <a:bodyPr wrap="square" lIns="0" tIns="0" rIns="0" bIns="0" rtlCol="0" anchor="t"/>
+          <a:lstStyle/>
+          <a:p>
+            <a:pPr algn="l" marL="342900" indent="-342900">
+              <a:lnSpc>
+                <a:spcPts val="1620"/>
+              </a:lnSpc>
+              <a:spcAft>
+                <a:spcPts val="300"/>
+              </a:spcAft>
+              <a:buSzPct val="100000"/>
+              <a:buChar char="•"/>
+            </a:pPr>
+            <a:r>
+              <a:rPr lang="en-US" sz="1200" dirty="0">
+                <a:solidFill>
+                  <a:srgbClr val="1C2833"/>
+                </a:solidFill>
+                <a:latin typeface="Arial" pitchFamily="34" charset="0"/>
+                <a:ea typeface="Arial" pitchFamily="34" charset="-122"/>
+                <a:cs typeface="Arial" pitchFamily="34" charset="-120"/>
+              </a:rPr>
+              <a:t>The Day 1 baseline sheets (returned today)</a:t>
+            </a:r>
+            <a:endParaRPr lang="en-US" sz="1200" dirty="0"/>
+          </a:p>
+          <a:p>
+            <a:pPr algn="l" marL="342900" indent="-342900">
+              <a:lnSpc>
+                <a:spcPts val="1620"/>
+              </a:lnSpc>
+              <a:spcAft>
+                <a:spcPts val="300"/>
+              </a:spcAft>
+              <a:buSzPct val="100000"/>
+              <a:buChar char="•"/>
+            </a:pPr>
+            <a:r>
+              <a:rPr lang="en-US" sz="1200" dirty="0">
+                <a:solidFill>
+                  <a:srgbClr val="1C2833"/>
+                </a:solidFill>
+                <a:latin typeface="Arial" pitchFamily="34" charset="0"/>
+                <a:ea typeface="Arial" pitchFamily="34" charset="-122"/>
+                <a:cs typeface="Arial" pitchFamily="34" charset="-120"/>
+              </a:rPr>
+              <a:t>Fresh paper for the retest</a:t>
+            </a:r>
+            <a:endParaRPr lang="en-US" sz="1200" dirty="0"/>
+          </a:p>
+          <a:p>
+            <a:pPr algn="l" marL="342900" indent="-342900">
+              <a:lnSpc>
+                <a:spcPts val="1620"/>
+              </a:lnSpc>
+              <a:spcAft>
+                <a:spcPts val="300"/>
+              </a:spcAft>
+              <a:buSzPct val="100000"/>
+              <a:buChar char="•"/>
+            </a:pPr>
+            <a:r>
+              <a:rPr lang="en-US" sz="1200" dirty="0">
+                <a:solidFill>
+                  <a:srgbClr val="1C2833"/>
+                </a:solidFill>
+                <a:latin typeface="Arial" pitchFamily="34" charset="0"/>
+                <a:ea typeface="Arial" pitchFamily="34" charset="-122"/>
+                <a:cs typeface="Arial" pitchFamily="34" charset="-120"/>
+              </a:rPr>
+              <a:t>quizzes/formative.md</a:t>
+            </a:r>
+            <a:pPr algn="l" indent="0" marL="0">
+              <a:lnSpc>
+                <a:spcPts val="1620"/>
+              </a:lnSpc>
+              <a:spcAft>
+                <a:spcPts val="300"/>
+              </a:spcAft>
+              <a:buNone/>
+            </a:pPr>
+            <a:r>
+              <a:rPr lang="en-US" sz="1200" dirty="0">
+                <a:solidFill>
+                  <a:srgbClr val="1C2833"/>
+                </a:solidFill>
+                <a:latin typeface="Arial" pitchFamily="34" charset="0"/>
+                <a:ea typeface="Arial" pitchFamily="34" charset="-122"/>
+                <a:cs typeface="Arial" pitchFamily="34" charset="-120"/>
+              </a:rPr>
+              <a:t> Part B (printed)</a:t>
+            </a:r>
+            <a:endParaRPr lang="en-US" sz="1200" dirty="0"/>
+          </a:p>
+          <a:p>
+            <a:pPr algn="l" marL="342900" indent="-342900">
+              <a:lnSpc>
+                <a:spcPts val="1620"/>
+              </a:lnSpc>
+              <a:spcAft>
+                <a:spcPts val="300"/>
+              </a:spcAft>
+              <a:buSzPct val="100000"/>
+              <a:buChar char="•"/>
+            </a:pPr>
+            <a:r>
+              <a:rPr lang="en-US" sz="1200" dirty="0">
+                <a:solidFill>
+                  <a:srgbClr val="1C2833"/>
+                </a:solidFill>
+                <a:latin typeface="Arial" pitchFamily="34" charset="0"/>
+                <a:ea typeface="Arial" pitchFamily="34" charset="-122"/>
+                <a:cs typeface="Arial" pitchFamily="34" charset="-120"/>
+              </a:rPr>
+              <a:t>Stopwatch</a:t>
+            </a:r>
+            <a:endParaRPr lang="en-US" sz="1200" dirty="0"/>
+          </a:p>
+        </p:txBody>
+      </p:sp>
+      <p:sp>
+        <p:nvSpPr>
+          <p:cNvPr id="5" name="Text 3"/>
           <p:cNvSpPr/>
           <p:nvPr/>
         </p:nvSpPr>
@@ -4701,7 +6054,7 @@
                 <a:ea typeface="Georgia" pitchFamily="34" charset="-122"/>
                 <a:cs typeface="Georgia" pitchFamily="34" charset="-120"/>
               </a:rPr>
-              <a:t>Warm-up (5 min)</a:t>
+              <a:t>Lesson flow</a:t>
             </a:r>
             <a:endParaRPr lang="en-US" sz="1800" dirty="0"/>
           </a:p>
@@ -4710,54 +6063,6 @@
       <p:sp>
         <p:nvSpPr>
           <p:cNvPr id="4" name="Text 2"/>
-          <p:cNvSpPr/>
-          <p:nvPr/>
-        </p:nvSpPr>
-        <p:spPr>
-          <a:xfrm>
-            <a:off x="406301" y="870942"/>
-            <a:ext cx="8498026" cy="213271"/>
-          </a:xfrm>
-          <a:prstGeom prst="rect">
-            <a:avLst/>
-          </a:prstGeom>
-          <a:noFill/>
-          <a:ln/>
-        </p:spPr>
-        <p:txBody>
-          <a:bodyPr wrap="square" lIns="0" tIns="0" rIns="0" bIns="0" rtlCol="0" anchor="t"/>
-          <a:lstStyle/>
-          <a:p>
-            <a:pPr algn="l" indent="0" marL="0">
-              <a:lnSpc>
-                <a:spcPts val="1680"/>
-              </a:lnSpc>
-              <a:spcBef>
-                <a:spcPts val="300"/>
-              </a:spcBef>
-              <a:spcAft>
-                <a:spcPts val="300"/>
-              </a:spcAft>
-              <a:buNone/>
-            </a:pPr>
-            <a:r>
-              <a:rPr lang="en-US" sz="1200" dirty="0">
-                <a:solidFill>
-                  <a:srgbClr val="1C2833"/>
-                </a:solidFill>
-                <a:latin typeface="Arial" pitchFamily="34" charset="0"/>
-                <a:ea typeface="Arial" pitchFamily="34" charset="-122"/>
-                <a:cs typeface="Arial" pitchFamily="34" charset="-120"/>
-              </a:rPr>
-              <a:t>– Sūtra chant 3 times (loud). – Make-10 reflex: 10 quick partners.</a:t>
-            </a:r>
-            <a:endParaRPr lang="en-US" sz="1200" dirty="0"/>
-          </a:p>
-        </p:txBody>
-      </p:sp>
-      <p:sp>
-        <p:nvSpPr>
-          <p:cNvPr id="5" name="Text 3"/>
           <p:cNvSpPr/>
           <p:nvPr/>
         </p:nvSpPr>
@@ -4907,7 +6212,7 @@
                 <a:ea typeface="Georgia" pitchFamily="34" charset="-122"/>
                 <a:cs typeface="Georgia" pitchFamily="34" charset="-120"/>
               </a:rPr>
-              <a:t>Retest of Day 1 baseline (8 min)</a:t>
+              <a:t>Warm-up (5 min)</a:t>
             </a:r>
             <a:endParaRPr lang="en-US" sz="1800" dirty="0"/>
           </a:p>
@@ -4921,8 +6226,8 @@
         </p:nvSpPr>
         <p:spPr>
           <a:xfrm>
-            <a:off x="406301" y="870942"/>
-            <a:ext cx="8498026" cy="445591"/>
+            <a:off x="634901" y="883593"/>
+            <a:ext cx="8102798" cy="525661"/>
           </a:xfrm>
           <a:prstGeom prst="rect">
             <a:avLst/>
@@ -4934,77 +6239,6 @@
           <a:bodyPr wrap="square" lIns="0" tIns="0" rIns="0" bIns="0" rtlCol="0" anchor="t"/>
           <a:lstStyle/>
           <a:p>
-            <a:pPr algn="l" indent="0" marL="0">
-              <a:lnSpc>
-                <a:spcPts val="1680"/>
-              </a:lnSpc>
-              <a:spcBef>
-                <a:spcPts val="300"/>
-              </a:spcBef>
-              <a:spcAft>
-                <a:spcPts val="300"/>
-              </a:spcAft>
-              <a:buNone/>
-            </a:pPr>
-            <a:r>
-              <a:rPr lang="en-US" sz="1200" dirty="0">
-                <a:solidFill>
-                  <a:srgbClr val="1C2833"/>
-                </a:solidFill>
-                <a:latin typeface="Arial" pitchFamily="34" charset="0"/>
-                <a:ea typeface="Arial" pitchFamily="34" charset="-122"/>
-                <a:cs typeface="Arial" pitchFamily="34" charset="-120"/>
-              </a:rPr>
-              <a:t>– Hand back the Day 1 sheets so students can see their old time. – Give a fresh sheet with the same problem: </a:t>
-            </a:r>
-            <a:pPr algn="l" indent="0" marL="0">
-              <a:lnSpc>
-                <a:spcPts val="1680"/>
-              </a:lnSpc>
-              <a:spcBef>
-                <a:spcPts val="300"/>
-              </a:spcBef>
-              <a:spcAft>
-                <a:spcPts val="300"/>
-              </a:spcAft>
-              <a:buNone/>
-            </a:pPr>
-            <a:r>
-              <a:rPr lang="en-US" sz="1200" dirty="0">
-                <a:solidFill>
-                  <a:srgbClr val="1C2833"/>
-                </a:solidFill>
-                <a:latin typeface="Arial" pitchFamily="34" charset="0"/>
-                <a:ea typeface="Arial" pitchFamily="34" charset="-122"/>
-                <a:cs typeface="Arial" pitchFamily="34" charset="-120"/>
-              </a:rPr>
-              <a:t>10 000 − 4567 = ?</a:t>
-            </a:r>
-            <a:endParaRPr lang="en-US" sz="1200" dirty="0"/>
-          </a:p>
-        </p:txBody>
-      </p:sp>
-      <p:sp>
-        <p:nvSpPr>
-          <p:cNvPr id="5" name="Text 3"/>
-          <p:cNvSpPr/>
-          <p:nvPr/>
-        </p:nvSpPr>
-        <p:spPr>
-          <a:xfrm>
-            <a:off x="634901" y="1405384"/>
-            <a:ext cx="8102798" cy="281880"/>
-          </a:xfrm>
-          <a:prstGeom prst="rect">
-            <a:avLst/>
-          </a:prstGeom>
-          <a:noFill/>
-          <a:ln/>
-        </p:spPr>
-        <p:txBody>
-          <a:bodyPr wrap="square" lIns="0" tIns="0" rIns="0" bIns="0" rtlCol="0" anchor="t"/>
-          <a:lstStyle/>
-          <a:p>
             <a:pPr algn="l" marL="342900" indent="-342900">
               <a:lnSpc>
                 <a:spcPts val="1620"/>
@@ -5016,88 +6250,18 @@
               <a:buChar char="•"/>
             </a:pPr>
             <a:r>
-              <a:rPr lang="en-US" sz="1200" i="1" dirty="0">
-                <a:solidFill>
-                  <a:srgbClr val="1C2833"/>
-                </a:solidFill>
-                <a:latin typeface="Arial" pitchFamily="34" charset="0"/>
-                <a:ea typeface="Arial" pitchFamily="34" charset="-122"/>
-                <a:cs typeface="Arial" pitchFamily="34" charset="-120"/>
-              </a:rPr>
-              <a:t>"Solve it the Nikhilam way. Time yourself."</a:t>
+              <a:rPr lang="en-US" sz="1200" dirty="0">
+                <a:solidFill>
+                  <a:srgbClr val="1C2833"/>
+                </a:solidFill>
+                <a:latin typeface="Arial" pitchFamily="34" charset="0"/>
+                <a:ea typeface="Arial" pitchFamily="34" charset="-122"/>
+                <a:cs typeface="Arial" pitchFamily="34" charset="-120"/>
+              </a:rPr>
+              <a:t>Sūtra chant 3 times (loud).</a:t>
             </a:r>
             <a:endParaRPr lang="en-US" sz="1200" dirty="0"/>
           </a:p>
-        </p:txBody>
-      </p:sp>
-      <p:sp>
-        <p:nvSpPr>
-          <p:cNvPr id="6" name="Text 4"/>
-          <p:cNvSpPr/>
-          <p:nvPr/>
-        </p:nvSpPr>
-        <p:spPr>
-          <a:xfrm>
-            <a:off x="406301" y="1776115"/>
-            <a:ext cx="8498026" cy="213271"/>
-          </a:xfrm>
-          <a:prstGeom prst="rect">
-            <a:avLst/>
-          </a:prstGeom>
-          <a:noFill/>
-          <a:ln/>
-        </p:spPr>
-        <p:txBody>
-          <a:bodyPr wrap="square" lIns="0" tIns="0" rIns="0" bIns="0" rtlCol="0" anchor="t"/>
-          <a:lstStyle/>
-          <a:p>
-            <a:pPr algn="l" indent="0" marL="0">
-              <a:lnSpc>
-                <a:spcPts val="1680"/>
-              </a:lnSpc>
-              <a:spcBef>
-                <a:spcPts val="300"/>
-              </a:spcBef>
-              <a:spcAft>
-                <a:spcPts val="300"/>
-              </a:spcAft>
-              <a:buNone/>
-            </a:pPr>
-            <a:r>
-              <a:rPr lang="en-US" sz="1200" dirty="0">
-                <a:solidFill>
-                  <a:srgbClr val="1C2833"/>
-                </a:solidFill>
-                <a:latin typeface="Arial" pitchFamily="34" charset="0"/>
-                <a:ea typeface="Arial" pitchFamily="34" charset="-122"/>
-                <a:cs typeface="Arial" pitchFamily="34" charset="-120"/>
-              </a:rPr>
-              <a:t>– Record new time below the old time.</a:t>
-            </a:r>
-            <a:endParaRPr lang="en-US" sz="1200" dirty="0"/>
-          </a:p>
-        </p:txBody>
-      </p:sp>
-      <p:sp>
-        <p:nvSpPr>
-          <p:cNvPr id="7" name="Text 5"/>
-          <p:cNvSpPr/>
-          <p:nvPr/>
-        </p:nvSpPr>
-        <p:spPr>
-          <a:xfrm>
-            <a:off x="634901" y="2078236"/>
-            <a:ext cx="8102798" cy="281880"/>
-          </a:xfrm>
-          <a:prstGeom prst="rect">
-            <a:avLst/>
-          </a:prstGeom>
-          <a:noFill/>
-          <a:ln/>
-        </p:spPr>
-        <p:txBody>
-          <a:bodyPr wrap="square" lIns="0" tIns="0" rIns="0" bIns="0" rtlCol="0" anchor="t"/>
-          <a:lstStyle/>
           <a:p>
             <a:pPr algn="l" marL="342900" indent="-342900">
               <a:lnSpc>
@@ -5110,35 +6274,15 @@
               <a:buChar char="•"/>
             </a:pPr>
             <a:r>
-              <a:rPr lang="en-US" sz="1200" b="1" dirty="0">
-                <a:solidFill>
-                  <a:srgbClr val="1C2833"/>
-                </a:solidFill>
-                <a:latin typeface="Arial" pitchFamily="34" charset="0"/>
-                <a:ea typeface="Arial" pitchFamily="34" charset="-122"/>
-                <a:cs typeface="Arial" pitchFamily="34" charset="-120"/>
-              </a:rPr>
-              <a:t>% improvement</a:t>
-            </a:r>
-            <a:pPr algn="l" indent="0" marL="0">
-              <a:lnSpc>
-                <a:spcPts val="1620"/>
-              </a:lnSpc>
-              <a:spcAft>
-                <a:spcPts val="300"/>
-              </a:spcAft>
-              <a:buNone/>
-            </a:pPr>
-            <a:r>
-              <a:rPr lang="en-US" sz="1200" dirty="0">
-                <a:solidFill>
-                  <a:srgbClr val="1C2833"/>
-                </a:solidFill>
-                <a:latin typeface="Arial" pitchFamily="34" charset="0"/>
-                <a:ea typeface="Arial" pitchFamily="34" charset="-122"/>
-                <a:cs typeface="Arial" pitchFamily="34" charset="-120"/>
-              </a:rPr>
-              <a:t> = (Day 1 time − Day 5 time) / Day 1 time × 100. Compute on the spot.</a:t>
+              <a:rPr lang="en-US" sz="1200" dirty="0">
+                <a:solidFill>
+                  <a:srgbClr val="1C2833"/>
+                </a:solidFill>
+                <a:latin typeface="Arial" pitchFamily="34" charset="0"/>
+                <a:ea typeface="Arial" pitchFamily="34" charset="-122"/>
+                <a:cs typeface="Arial" pitchFamily="34" charset="-120"/>
+              </a:rPr>
+              <a:t>Make-10 reflex: 10 quick partners.</a:t>
             </a:r>
             <a:endParaRPr lang="en-US" sz="1200" dirty="0"/>
           </a:p>
@@ -5146,7 +6290,7 @@
       </p:sp>
       <p:sp>
         <p:nvSpPr>
-          <p:cNvPr id="8" name="Text 6"/>
+          <p:cNvPr id="5" name="Text 3"/>
           <p:cNvSpPr/>
           <p:nvPr/>
         </p:nvSpPr>
@@ -5296,7 +6440,7 @@
                 <a:ea typeface="Georgia" pitchFamily="34" charset="-122"/>
                 <a:cs typeface="Georgia" pitchFamily="34" charset="-120"/>
               </a:rPr>
-              <a:t>Brief sharing (5 min)</a:t>
+              <a:t>Retest of Day 1 baseline (8 min)</a:t>
             </a:r>
             <a:endParaRPr lang="en-US" sz="1800" dirty="0"/>
           </a:p>
@@ -5310,8 +6454,8 @@
         </p:nvSpPr>
         <p:spPr>
           <a:xfrm>
-            <a:off x="406301" y="870942"/>
-            <a:ext cx="8498026" cy="213271"/>
+            <a:off x="634901" y="883593"/>
+            <a:ext cx="8102798" cy="1276052"/>
           </a:xfrm>
           <a:prstGeom prst="rect">
             <a:avLst/>
@@ -5323,54 +6467,6 @@
           <a:bodyPr wrap="square" lIns="0" tIns="0" rIns="0" bIns="0" rtlCol="0" anchor="t"/>
           <a:lstStyle/>
           <a:p>
-            <a:pPr algn="l" indent="0" marL="0">
-              <a:lnSpc>
-                <a:spcPts val="1680"/>
-              </a:lnSpc>
-              <a:spcBef>
-                <a:spcPts val="300"/>
-              </a:spcBef>
-              <a:spcAft>
-                <a:spcPts val="300"/>
-              </a:spcAft>
-              <a:buNone/>
-            </a:pPr>
-            <a:r>
-              <a:rPr lang="en-US" sz="1200" dirty="0">
-                <a:solidFill>
-                  <a:srgbClr val="1C2833"/>
-                </a:solidFill>
-                <a:latin typeface="Arial" pitchFamily="34" charset="0"/>
-                <a:ea typeface="Arial" pitchFamily="34" charset="-122"/>
-                <a:cs typeface="Arial" pitchFamily="34" charset="-120"/>
-              </a:rPr>
-              <a:t>– 3 volunteers share their % improvement.</a:t>
-            </a:r>
-            <a:endParaRPr lang="en-US" sz="1200" dirty="0"/>
-          </a:p>
-        </p:txBody>
-      </p:sp>
-      <p:sp>
-        <p:nvSpPr>
-          <p:cNvPr id="5" name="Text 3"/>
-          <p:cNvSpPr/>
-          <p:nvPr/>
-        </p:nvSpPr>
-        <p:spPr>
-          <a:xfrm>
-            <a:off x="634901" y="1173063"/>
-            <a:ext cx="8102798" cy="281880"/>
-          </a:xfrm>
-          <a:prstGeom prst="rect">
-            <a:avLst/>
-          </a:prstGeom>
-          <a:noFill/>
-          <a:ln/>
-        </p:spPr>
-        <p:txBody>
-          <a:bodyPr wrap="square" lIns="0" tIns="0" rIns="0" bIns="0" rtlCol="0" anchor="t"/>
-          <a:lstStyle/>
-          <a:p>
             <a:pPr algn="l" marL="342900" indent="-342900">
               <a:lnSpc>
                 <a:spcPts val="1620"/>
@@ -5382,6 +6478,74 @@
               <a:buChar char="•"/>
             </a:pPr>
             <a:r>
+              <a:rPr lang="en-US" sz="1200" dirty="0">
+                <a:solidFill>
+                  <a:srgbClr val="1C2833"/>
+                </a:solidFill>
+                <a:latin typeface="Arial" pitchFamily="34" charset="0"/>
+                <a:ea typeface="Arial" pitchFamily="34" charset="-122"/>
+                <a:cs typeface="Arial" pitchFamily="34" charset="-120"/>
+              </a:rPr>
+              <a:t>Hand back the Day 1 sheets so students can see their old time.</a:t>
+            </a:r>
+            <a:endParaRPr lang="en-US" sz="1200" dirty="0"/>
+          </a:p>
+          <a:p>
+            <a:pPr algn="l" marL="342900" indent="-342900">
+              <a:lnSpc>
+                <a:spcPts val="1620"/>
+              </a:lnSpc>
+              <a:spcAft>
+                <a:spcPts val="300"/>
+              </a:spcAft>
+              <a:buSzPct val="100000"/>
+              <a:buChar char="•"/>
+            </a:pPr>
+            <a:r>
+              <a:rPr lang="en-US" sz="1200" dirty="0">
+                <a:solidFill>
+                  <a:srgbClr val="1C2833"/>
+                </a:solidFill>
+                <a:latin typeface="Arial" pitchFamily="34" charset="0"/>
+                <a:ea typeface="Arial" pitchFamily="34" charset="-122"/>
+                <a:cs typeface="Arial" pitchFamily="34" charset="-120"/>
+              </a:rPr>
+              <a:t>Give a fresh sheet with the same problem: </a:t>
+            </a:r>
+            <a:pPr algn="l" indent="0" marL="0">
+              <a:lnSpc>
+                <a:spcPts val="1620"/>
+              </a:lnSpc>
+              <a:spcAft>
+                <a:spcPts val="300"/>
+              </a:spcAft>
+              <a:buNone/>
+            </a:pPr>
+            <a:r>
+              <a:rPr lang="en-US" sz="1200" dirty="0">
+                <a:solidFill>
+                  <a:srgbClr val="1C2833"/>
+                </a:solidFill>
+                <a:latin typeface="Arial" pitchFamily="34" charset="0"/>
+                <a:ea typeface="Arial" pitchFamily="34" charset="-122"/>
+                <a:cs typeface="Arial" pitchFamily="34" charset="-120"/>
+              </a:rPr>
+              <a:t>10 000 − 4567 = ?</a:t>
+            </a:r>
+            <a:endParaRPr lang="en-US" sz="1200" dirty="0"/>
+          </a:p>
+          <a:p>
+            <a:pPr algn="l" marL="342900" indent="-342900">
+              <a:lnSpc>
+                <a:spcPts val="1620"/>
+              </a:lnSpc>
+              <a:spcAft>
+                <a:spcPts val="300"/>
+              </a:spcAft>
+              <a:buSzPct val="100000"/>
+              <a:buChar char="•"/>
+            </a:pPr>
+            <a:r>
               <a:rPr lang="en-US" sz="1200" i="1" dirty="0">
                 <a:solidFill>
                   <a:srgbClr val="1C2833"/>
@@ -5390,15 +6554,83 @@
                 <a:ea typeface="Arial" pitchFamily="34" charset="-122"/>
                 <a:cs typeface="Arial" pitchFamily="34" charset="-120"/>
               </a:rPr>
-              <a:t>"Some of you went from 30 sec to 8 sec. Some from 18 sec to 15 sec. Both are wins. The point is the trend."</a:t>
+              <a:t>"Solve it the Nikhilam way. Time yourself."</a:t>
             </a:r>
             <a:endParaRPr lang="en-US" sz="1200" dirty="0"/>
           </a:p>
-        </p:txBody>
-      </p:sp>
-      <p:sp>
-        <p:nvSpPr>
-          <p:cNvPr id="6" name="Text 4"/>
+          <a:p>
+            <a:pPr algn="l" marL="342900" indent="-342900">
+              <a:lnSpc>
+                <a:spcPts val="1620"/>
+              </a:lnSpc>
+              <a:spcAft>
+                <a:spcPts val="300"/>
+              </a:spcAft>
+              <a:buSzPct val="100000"/>
+              <a:buChar char="•"/>
+            </a:pPr>
+            <a:r>
+              <a:rPr lang="en-US" sz="1200" dirty="0">
+                <a:solidFill>
+                  <a:srgbClr val="1C2833"/>
+                </a:solidFill>
+                <a:latin typeface="Arial" pitchFamily="34" charset="0"/>
+                <a:ea typeface="Arial" pitchFamily="34" charset="-122"/>
+                <a:cs typeface="Arial" pitchFamily="34" charset="-120"/>
+              </a:rPr>
+              <a:t>Record new time below the old time.</a:t>
+            </a:r>
+            <a:endParaRPr lang="en-US" sz="1200" dirty="0"/>
+          </a:p>
+          <a:p>
+            <a:pPr algn="l" marL="342900" indent="-342900">
+              <a:lnSpc>
+                <a:spcPts val="1620"/>
+              </a:lnSpc>
+              <a:spcAft>
+                <a:spcPts val="300"/>
+              </a:spcAft>
+              <a:buSzPct val="100000"/>
+              <a:buChar char="•"/>
+            </a:pPr>
+            <a:r>
+              <a:rPr lang="en-US" sz="1200" b="1" dirty="0">
+                <a:solidFill>
+                  <a:srgbClr val="1C2833"/>
+                </a:solidFill>
+                <a:latin typeface="Arial" pitchFamily="34" charset="0"/>
+                <a:ea typeface="Arial" pitchFamily="34" charset="-122"/>
+                <a:cs typeface="Arial" pitchFamily="34" charset="-120"/>
+              </a:rPr>
+              <a:t>% improvement</a:t>
+            </a:r>
+            <a:pPr algn="l" indent="0" marL="0">
+              <a:lnSpc>
+                <a:spcPts val="1620"/>
+              </a:lnSpc>
+              <a:spcAft>
+                <a:spcPts val="300"/>
+              </a:spcAft>
+              <a:buNone/>
+            </a:pPr>
+            <a:r>
+              <a:rPr lang="en-US" sz="1200" dirty="0">
+                <a:solidFill>
+                  <a:srgbClr val="1C2833"/>
+                </a:solidFill>
+                <a:latin typeface="Arial" pitchFamily="34" charset="0"/>
+                <a:ea typeface="Arial" pitchFamily="34" charset="-122"/>
+                <a:cs typeface="Arial" pitchFamily="34" charset="-120"/>
+              </a:rPr>
+              <a:t> = (Day 1 time − Day 5 time) / Day 1 time × 100. Compute on the spot.</a:t>
+            </a:r>
+            <a:endParaRPr lang="en-US" sz="1200" dirty="0"/>
+          </a:p>
+        </p:txBody>
+      </p:sp>
+      <p:sp>
+        <p:nvSpPr>
+          <p:cNvPr id="5" name="Text 3"/>
           <p:cNvSpPr/>
           <p:nvPr/>
         </p:nvSpPr>
@@ -5548,7 +6780,7 @@
                 <a:ea typeface="Georgia" pitchFamily="34" charset="-122"/>
                 <a:cs typeface="Georgia" pitchFamily="34" charset="-120"/>
               </a:rPr>
-              <a:t>Formative quiz Part B (15 min)</a:t>
+              <a:t>Brief sharing (5 min)</a:t>
             </a:r>
             <a:endParaRPr lang="en-US" sz="1800" dirty="0"/>
           </a:p>
@@ -5562,8 +6794,8 @@
         </p:nvSpPr>
         <p:spPr>
           <a:xfrm>
-            <a:off x="406301" y="870942"/>
-            <a:ext cx="8498026" cy="658862"/>
+            <a:off x="634901" y="883593"/>
+            <a:ext cx="8102798" cy="525661"/>
           </a:xfrm>
           <a:prstGeom prst="rect">
             <a:avLst/>
@@ -5575,166 +6807,50 @@
           <a:bodyPr wrap="square" lIns="0" tIns="0" rIns="0" bIns="0" rtlCol="0" anchor="t"/>
           <a:lstStyle/>
           <a:p>
-            <a:pPr algn="l" indent="0" marL="0">
-              <a:lnSpc>
-                <a:spcPts val="1680"/>
-              </a:lnSpc>
-              <a:spcBef>
-                <a:spcPts val="300"/>
-              </a:spcBef>
-              <a:spcAft>
-                <a:spcPts val="300"/>
-              </a:spcAft>
-              <a:buNone/>
-            </a:pPr>
-            <a:r>
-              <a:rPr lang="en-US" sz="1200" dirty="0">
-                <a:solidFill>
-                  <a:srgbClr val="1C2833"/>
-                </a:solidFill>
-                <a:latin typeface="Arial" pitchFamily="34" charset="0"/>
-                <a:ea typeface="Arial" pitchFamily="34" charset="-122"/>
-                <a:cs typeface="Arial" pitchFamily="34" charset="-120"/>
-              </a:rPr>
-              <a:t>– Hand out </a:t>
-            </a:r>
-            <a:pPr algn="l" indent="0" marL="0">
-              <a:lnSpc>
-                <a:spcPts val="1680"/>
-              </a:lnSpc>
-              <a:spcBef>
-                <a:spcPts val="300"/>
-              </a:spcBef>
-              <a:spcAft>
-                <a:spcPts val="300"/>
-              </a:spcAft>
-              <a:buNone/>
-            </a:pPr>
-            <a:r>
-              <a:rPr lang="en-US" sz="1200" dirty="0">
-                <a:solidFill>
-                  <a:srgbClr val="1C2833"/>
-                </a:solidFill>
-                <a:latin typeface="Arial" pitchFamily="34" charset="0"/>
-                <a:ea typeface="Arial" pitchFamily="34" charset="-122"/>
-                <a:cs typeface="Arial" pitchFamily="34" charset="-120"/>
-              </a:rPr>
-              <a:t>quizzes/formative.md</a:t>
-            </a:r>
-            <a:pPr algn="l" indent="0" marL="0">
-              <a:lnSpc>
-                <a:spcPts val="1680"/>
-              </a:lnSpc>
-              <a:spcBef>
-                <a:spcPts val="300"/>
-              </a:spcBef>
-              <a:spcAft>
-                <a:spcPts val="300"/>
-              </a:spcAft>
-              <a:buNone/>
-            </a:pPr>
-            <a:r>
-              <a:rPr lang="en-US" sz="1200" dirty="0">
-                <a:solidFill>
-                  <a:srgbClr val="1C2833"/>
-                </a:solidFill>
-                <a:latin typeface="Arial" pitchFamily="34" charset="0"/>
-                <a:ea typeface="Arial" pitchFamily="34" charset="-122"/>
-                <a:cs typeface="Arial" pitchFamily="34" charset="-120"/>
-              </a:rPr>
-              <a:t> Part B. – 12 mixed problems: 3 complement-to-100, 4 complement-to-1000 / </a:t>
-            </a:r>
-            <a:pPr algn="l" indent="0" marL="0">
-              <a:lnSpc>
-                <a:spcPts val="1680"/>
-              </a:lnSpc>
-              <a:spcBef>
-                <a:spcPts val="300"/>
-              </a:spcBef>
-              <a:spcAft>
-                <a:spcPts val="300"/>
-              </a:spcAft>
-              <a:buNone/>
-            </a:pPr>
-            <a:r>
-              <a:rPr lang="en-US" sz="1200" dirty="0">
-                <a:solidFill>
-                  <a:srgbClr val="1C2833"/>
-                </a:solidFill>
-                <a:latin typeface="Arial" pitchFamily="34" charset="0"/>
-                <a:ea typeface="Arial" pitchFamily="34" charset="-122"/>
-                <a:cs typeface="Arial" pitchFamily="34" charset="-120"/>
-              </a:rPr>
-              <a:t>1000 − N</a:t>
-            </a:r>
-            <a:pPr algn="l" indent="0" marL="0">
-              <a:lnSpc>
-                <a:spcPts val="1680"/>
-              </a:lnSpc>
-              <a:spcBef>
-                <a:spcPts val="300"/>
-              </a:spcBef>
-              <a:spcAft>
-                <a:spcPts val="300"/>
-              </a:spcAft>
-              <a:buNone/>
-            </a:pPr>
-            <a:r>
-              <a:rPr lang="en-US" sz="1200" dirty="0">
-                <a:solidFill>
-                  <a:srgbClr val="1C2833"/>
-                </a:solidFill>
-                <a:latin typeface="Arial" pitchFamily="34" charset="0"/>
-                <a:ea typeface="Arial" pitchFamily="34" charset="-122"/>
-                <a:cs typeface="Arial" pitchFamily="34" charset="-120"/>
-              </a:rPr>
-              <a:t>, 3 </a:t>
-            </a:r>
-            <a:pPr algn="l" indent="0" marL="0">
-              <a:lnSpc>
-                <a:spcPts val="1680"/>
-              </a:lnSpc>
-              <a:spcBef>
-                <a:spcPts val="300"/>
-              </a:spcBef>
-              <a:spcAft>
-                <a:spcPts val="300"/>
-              </a:spcAft>
-              <a:buNone/>
-            </a:pPr>
-            <a:r>
-              <a:rPr lang="en-US" sz="1200" dirty="0">
-                <a:solidFill>
-                  <a:srgbClr val="1C2833"/>
-                </a:solidFill>
-                <a:latin typeface="Arial" pitchFamily="34" charset="0"/>
-                <a:ea typeface="Arial" pitchFamily="34" charset="-122"/>
-                <a:cs typeface="Arial" pitchFamily="34" charset="-120"/>
-              </a:rPr>
-              <a:t>10 000 − N</a:t>
-            </a:r>
-            <a:pPr algn="l" indent="0" marL="0">
-              <a:lnSpc>
-                <a:spcPts val="1680"/>
-              </a:lnSpc>
-              <a:spcBef>
-                <a:spcPts val="300"/>
-              </a:spcBef>
-              <a:spcAft>
-                <a:spcPts val="300"/>
-              </a:spcAft>
-              <a:buNone/>
-            </a:pPr>
-            <a:r>
-              <a:rPr lang="en-US" sz="1200" dirty="0">
-                <a:solidFill>
-                  <a:srgbClr val="1C2833"/>
-                </a:solidFill>
-                <a:latin typeface="Arial" pitchFamily="34" charset="0"/>
-                <a:ea typeface="Arial" pitchFamily="34" charset="-122"/>
-                <a:cs typeface="Arial" pitchFamily="34" charset="-120"/>
-              </a:rPr>
-              <a:t>, 1 four-digit padding case, 1 short answer ("state the sūtra in English and Sanskrit"). – Closed notebook. Aim to finish in 12 minutes. – Collect for grading.</a:t>
+            <a:pPr algn="l" marL="342900" indent="-342900">
+              <a:lnSpc>
+                <a:spcPts val="1620"/>
+              </a:lnSpc>
+              <a:spcAft>
+                <a:spcPts val="300"/>
+              </a:spcAft>
+              <a:buSzPct val="100000"/>
+              <a:buChar char="•"/>
+            </a:pPr>
+            <a:r>
+              <a:rPr lang="en-US" sz="1200" dirty="0">
+                <a:solidFill>
+                  <a:srgbClr val="1C2833"/>
+                </a:solidFill>
+                <a:latin typeface="Arial" pitchFamily="34" charset="0"/>
+                <a:ea typeface="Arial" pitchFamily="34" charset="-122"/>
+                <a:cs typeface="Arial" pitchFamily="34" charset="-120"/>
+              </a:rPr>
+              <a:t>3 volunteers share their % improvement.</a:t>
+            </a:r>
+            <a:endParaRPr lang="en-US" sz="1200" dirty="0"/>
+          </a:p>
+          <a:p>
+            <a:pPr algn="l" marL="342900" indent="-342900">
+              <a:lnSpc>
+                <a:spcPts val="1620"/>
+              </a:lnSpc>
+              <a:spcAft>
+                <a:spcPts val="300"/>
+              </a:spcAft>
+              <a:buSzPct val="100000"/>
+              <a:buChar char="•"/>
+            </a:pPr>
+            <a:r>
+              <a:rPr lang="en-US" sz="1200" i="1" dirty="0">
+                <a:solidFill>
+                  <a:srgbClr val="1C2833"/>
+                </a:solidFill>
+                <a:latin typeface="Arial" pitchFamily="34" charset="0"/>
+                <a:ea typeface="Arial" pitchFamily="34" charset="-122"/>
+                <a:cs typeface="Arial" pitchFamily="34" charset="-120"/>
+              </a:rPr>
+              <a:t>"Some of you went from 30 sec to 8 sec. Some from 18 sec to 15 sec. Both are wins. The point is the trend."</a:t>
             </a:r>
             <a:endParaRPr lang="en-US" sz="1200" dirty="0"/>
           </a:p>
@@ -5892,7 +7008,7 @@
                 <a:ea typeface="Georgia" pitchFamily="34" charset="-122"/>
                 <a:cs typeface="Georgia" pitchFamily="34" charset="-120"/>
               </a:rPr>
-              <a:t>Diagnostic discussion (10 min)</a:t>
+              <a:t>Formative quiz Part B (15 min)</a:t>
             </a:r>
             <a:endParaRPr lang="en-US" sz="1800" dirty="0"/>
           </a:p>
@@ -5906,8 +7022,8 @@
         </p:nvSpPr>
         <p:spPr>
           <a:xfrm>
-            <a:off x="406301" y="870942"/>
-            <a:ext cx="8498026" cy="213271"/>
+            <a:off x="634901" y="883593"/>
+            <a:ext cx="8102798" cy="1257002"/>
           </a:xfrm>
           <a:prstGeom prst="rect">
             <a:avLst/>
@@ -5919,546 +7035,226 @@
           <a:bodyPr wrap="square" lIns="0" tIns="0" rIns="0" bIns="0" rtlCol="0" anchor="t"/>
           <a:lstStyle/>
           <a:p>
-            <a:pPr algn="l" indent="0" marL="0">
-              <a:lnSpc>
-                <a:spcPts val="1680"/>
-              </a:lnSpc>
-              <a:spcBef>
-                <a:spcPts val="300"/>
-              </a:spcBef>
-              <a:spcAft>
-                <a:spcPts val="300"/>
-              </a:spcAft>
-              <a:buNone/>
-            </a:pPr>
-            <a:r>
-              <a:rPr lang="en-US" sz="1200" dirty="0">
-                <a:solidFill>
-                  <a:srgbClr val="1C2833"/>
-                </a:solidFill>
-                <a:latin typeface="Arial" pitchFamily="34" charset="0"/>
-                <a:ea typeface="Arial" pitchFamily="34" charset="-122"/>
-                <a:cs typeface="Arial" pitchFamily="34" charset="-120"/>
-              </a:rPr>
-              <a:t>– While the quiz is being graded (or based on a quick teacher scan), call out three common error types on the board:</a:t>
+            <a:pPr algn="l" marL="342900" indent="-342900">
+              <a:lnSpc>
+                <a:spcPts val="1620"/>
+              </a:lnSpc>
+              <a:spcAft>
+                <a:spcPts val="300"/>
+              </a:spcAft>
+              <a:buSzPct val="100000"/>
+              <a:buChar char="•"/>
+            </a:pPr>
+            <a:r>
+              <a:rPr lang="en-US" sz="1200" dirty="0">
+                <a:solidFill>
+                  <a:srgbClr val="1C2833"/>
+                </a:solidFill>
+                <a:latin typeface="Arial" pitchFamily="34" charset="0"/>
+                <a:ea typeface="Arial" pitchFamily="34" charset="-122"/>
+                <a:cs typeface="Arial" pitchFamily="34" charset="-120"/>
+              </a:rPr>
+              <a:t>Hand out </a:t>
+            </a:r>
+            <a:pPr algn="l" indent="0" marL="0">
+              <a:lnSpc>
+                <a:spcPts val="1620"/>
+              </a:lnSpc>
+              <a:spcAft>
+                <a:spcPts val="300"/>
+              </a:spcAft>
+              <a:buNone/>
+            </a:pPr>
+            <a:r>
+              <a:rPr lang="en-US" sz="1200" dirty="0">
+                <a:solidFill>
+                  <a:srgbClr val="1C2833"/>
+                </a:solidFill>
+                <a:latin typeface="Arial" pitchFamily="34" charset="0"/>
+                <a:ea typeface="Arial" pitchFamily="34" charset="-122"/>
+                <a:cs typeface="Arial" pitchFamily="34" charset="-120"/>
+              </a:rPr>
+              <a:t>quizzes/formative.md</a:t>
+            </a:r>
+            <a:pPr algn="l" indent="0" marL="0">
+              <a:lnSpc>
+                <a:spcPts val="1620"/>
+              </a:lnSpc>
+              <a:spcAft>
+                <a:spcPts val="300"/>
+              </a:spcAft>
+              <a:buNone/>
+            </a:pPr>
+            <a:r>
+              <a:rPr lang="en-US" sz="1200" dirty="0">
+                <a:solidFill>
+                  <a:srgbClr val="1C2833"/>
+                </a:solidFill>
+                <a:latin typeface="Arial" pitchFamily="34" charset="0"/>
+                <a:ea typeface="Arial" pitchFamily="34" charset="-122"/>
+                <a:cs typeface="Arial" pitchFamily="34" charset="-120"/>
+              </a:rPr>
+              <a:t> Part B.</a:t>
             </a:r>
             <a:endParaRPr lang="en-US" sz="1200" dirty="0"/>
           </a:p>
+          <a:p>
+            <a:pPr algn="l" marL="342900" indent="-342900">
+              <a:lnSpc>
+                <a:spcPts val="1620"/>
+              </a:lnSpc>
+              <a:spcAft>
+                <a:spcPts val="300"/>
+              </a:spcAft>
+              <a:buSzPct val="100000"/>
+              <a:buChar char="•"/>
+            </a:pPr>
+            <a:r>
+              <a:rPr lang="en-US" sz="1200" dirty="0">
+                <a:solidFill>
+                  <a:srgbClr val="1C2833"/>
+                </a:solidFill>
+                <a:latin typeface="Arial" pitchFamily="34" charset="0"/>
+                <a:ea typeface="Arial" pitchFamily="34" charset="-122"/>
+                <a:cs typeface="Arial" pitchFamily="34" charset="-120"/>
+              </a:rPr>
+              <a:t>12 mixed problems: 3 complement-to-100, 4 complement-to-1000 / </a:t>
+            </a:r>
+            <a:pPr algn="l" indent="0" marL="0">
+              <a:lnSpc>
+                <a:spcPts val="1620"/>
+              </a:lnSpc>
+              <a:spcAft>
+                <a:spcPts val="300"/>
+              </a:spcAft>
+              <a:buNone/>
+            </a:pPr>
+            <a:r>
+              <a:rPr lang="en-US" sz="1200" dirty="0">
+                <a:solidFill>
+                  <a:srgbClr val="1C2833"/>
+                </a:solidFill>
+                <a:latin typeface="Arial" pitchFamily="34" charset="0"/>
+                <a:ea typeface="Arial" pitchFamily="34" charset="-122"/>
+                <a:cs typeface="Arial" pitchFamily="34" charset="-120"/>
+              </a:rPr>
+              <a:t>1000 − N</a:t>
+            </a:r>
+            <a:pPr algn="l" indent="0" marL="0">
+              <a:lnSpc>
+                <a:spcPts val="1620"/>
+              </a:lnSpc>
+              <a:spcAft>
+                <a:spcPts val="300"/>
+              </a:spcAft>
+              <a:buNone/>
+            </a:pPr>
+            <a:r>
+              <a:rPr lang="en-US" sz="1200" dirty="0">
+                <a:solidFill>
+                  <a:srgbClr val="1C2833"/>
+                </a:solidFill>
+                <a:latin typeface="Arial" pitchFamily="34" charset="0"/>
+                <a:ea typeface="Arial" pitchFamily="34" charset="-122"/>
+                <a:cs typeface="Arial" pitchFamily="34" charset="-120"/>
+              </a:rPr>
+              <a:t>, 3 </a:t>
+            </a:r>
+            <a:pPr algn="l" indent="0" marL="0">
+              <a:lnSpc>
+                <a:spcPts val="1620"/>
+              </a:lnSpc>
+              <a:spcAft>
+                <a:spcPts val="300"/>
+              </a:spcAft>
+              <a:buNone/>
+            </a:pPr>
+            <a:r>
+              <a:rPr lang="en-US" sz="1200" dirty="0">
+                <a:solidFill>
+                  <a:srgbClr val="1C2833"/>
+                </a:solidFill>
+                <a:latin typeface="Arial" pitchFamily="34" charset="0"/>
+                <a:ea typeface="Arial" pitchFamily="34" charset="-122"/>
+                <a:cs typeface="Arial" pitchFamily="34" charset="-120"/>
+              </a:rPr>
+              <a:t>10 000 − N</a:t>
+            </a:r>
+            <a:pPr algn="l" indent="0" marL="0">
+              <a:lnSpc>
+                <a:spcPts val="1620"/>
+              </a:lnSpc>
+              <a:spcAft>
+                <a:spcPts val="300"/>
+              </a:spcAft>
+              <a:buNone/>
+            </a:pPr>
+            <a:r>
+              <a:rPr lang="en-US" sz="1200" dirty="0">
+                <a:solidFill>
+                  <a:srgbClr val="1C2833"/>
+                </a:solidFill>
+                <a:latin typeface="Arial" pitchFamily="34" charset="0"/>
+                <a:ea typeface="Arial" pitchFamily="34" charset="-122"/>
+                <a:cs typeface="Arial" pitchFamily="34" charset="-120"/>
+              </a:rPr>
+              <a:t>, 1 four-digit padding case, 1 short answer ("state the sūtra in English and Sanskrit").</a:t>
+            </a:r>
+            <a:endParaRPr lang="en-US" sz="1200" dirty="0"/>
+          </a:p>
+          <a:p>
+            <a:pPr algn="l" marL="342900" indent="-342900">
+              <a:lnSpc>
+                <a:spcPts val="1620"/>
+              </a:lnSpc>
+              <a:spcAft>
+                <a:spcPts val="300"/>
+              </a:spcAft>
+              <a:buSzPct val="100000"/>
+              <a:buChar char="•"/>
+            </a:pPr>
+            <a:r>
+              <a:rPr lang="en-US" sz="1200" dirty="0">
+                <a:solidFill>
+                  <a:srgbClr val="1C2833"/>
+                </a:solidFill>
+                <a:latin typeface="Arial" pitchFamily="34" charset="0"/>
+                <a:ea typeface="Arial" pitchFamily="34" charset="-122"/>
+                <a:cs typeface="Arial" pitchFamily="34" charset="-120"/>
+              </a:rPr>
+              <a:t>Closed notebook. Aim to finish in 12 minutes.</a:t>
+            </a:r>
+            <a:endParaRPr lang="en-US" sz="1200" dirty="0"/>
+          </a:p>
+          <a:p>
+            <a:pPr algn="l" marL="342900" indent="-342900">
+              <a:lnSpc>
+                <a:spcPts val="1620"/>
+              </a:lnSpc>
+              <a:spcAft>
+                <a:spcPts val="300"/>
+              </a:spcAft>
+              <a:buSzPct val="100000"/>
+              <a:buChar char="•"/>
+            </a:pPr>
+            <a:r>
+              <a:rPr lang="en-US" sz="1200" dirty="0">
+                <a:solidFill>
+                  <a:srgbClr val="1C2833"/>
+                </a:solidFill>
+                <a:latin typeface="Arial" pitchFamily="34" charset="0"/>
+                <a:ea typeface="Arial" pitchFamily="34" charset="-122"/>
+                <a:cs typeface="Arial" pitchFamily="34" charset="-120"/>
+              </a:rPr>
+              <a:t>Collect for grading.</a:t>
+            </a:r>
+            <a:endParaRPr lang="en-US" sz="1200" dirty="0"/>
+          </a:p>
         </p:txBody>
       </p:sp>
       <p:sp>
         <p:nvSpPr>
           <p:cNvPr id="5" name="Text 3"/>
-          <p:cNvSpPr/>
-          <p:nvPr/>
-        </p:nvSpPr>
-        <p:spPr>
-          <a:xfrm>
-            <a:off x="406301" y="1160413"/>
-            <a:ext cx="8498026" cy="1104454"/>
-          </a:xfrm>
-          <a:prstGeom prst="rect">
-            <a:avLst/>
-          </a:prstGeom>
-          <a:noFill/>
-          <a:ln/>
-        </p:spPr>
-        <p:txBody>
-          <a:bodyPr wrap="square" lIns="0" tIns="0" rIns="0" bIns="0" rtlCol="0" anchor="t"/>
-          <a:lstStyle/>
-          <a:p>
-            <a:pPr algn="l" indent="0" marL="0">
-              <a:lnSpc>
-                <a:spcPts val="1680"/>
-              </a:lnSpc>
-              <a:spcBef>
-                <a:spcPts val="300"/>
-              </a:spcBef>
-              <a:spcAft>
-                <a:spcPts val="300"/>
-              </a:spcAft>
-              <a:buNone/>
-            </a:pPr>
-            <a:r>
-              <a:rPr lang="en-US" sz="1200" dirty="0">
-                <a:solidFill>
-                  <a:srgbClr val="1C2833"/>
-                </a:solidFill>
-                <a:latin typeface="Arial" pitchFamily="34" charset="0"/>
-                <a:ea typeface="Arial" pitchFamily="34" charset="-122"/>
-                <a:cs typeface="Arial" pitchFamily="34" charset="-120"/>
-              </a:rPr>
-              <a:t>1. </a:t>
-            </a:r>
-            <a:pPr algn="l" indent="0" marL="0">
-              <a:lnSpc>
-                <a:spcPts val="1680"/>
-              </a:lnSpc>
-              <a:spcBef>
-                <a:spcPts val="300"/>
-              </a:spcBef>
-              <a:spcAft>
-                <a:spcPts val="300"/>
-              </a:spcAft>
-              <a:buNone/>
-            </a:pPr>
-            <a:r>
-              <a:rPr lang="en-US" sz="1200" b="1" dirty="0">
-                <a:solidFill>
-                  <a:srgbClr val="1C2833"/>
-                </a:solidFill>
-                <a:latin typeface="Arial" pitchFamily="34" charset="0"/>
-                <a:ea typeface="Arial" pitchFamily="34" charset="-122"/>
-                <a:cs typeface="Arial" pitchFamily="34" charset="-120"/>
-              </a:rPr>
-              <a:t>Padding error</a:t>
-            </a:r>
-            <a:pPr algn="l" indent="0" marL="0">
-              <a:lnSpc>
-                <a:spcPts val="1680"/>
-              </a:lnSpc>
-              <a:spcBef>
-                <a:spcPts val="300"/>
-              </a:spcBef>
-              <a:spcAft>
-                <a:spcPts val="300"/>
-              </a:spcAft>
-              <a:buNone/>
-            </a:pPr>
-            <a:r>
-              <a:rPr lang="en-US" sz="1200" dirty="0">
-                <a:solidFill>
-                  <a:srgbClr val="1C2833"/>
-                </a:solidFill>
-                <a:latin typeface="Arial" pitchFamily="34" charset="0"/>
-                <a:ea typeface="Arial" pitchFamily="34" charset="-122"/>
-                <a:cs typeface="Arial" pitchFamily="34" charset="-120"/>
-              </a:rPr>
-              <a:t> — student wrote </a:t>
-            </a:r>
-            <a:pPr algn="l" indent="0" marL="0">
-              <a:lnSpc>
-                <a:spcPts val="1680"/>
-              </a:lnSpc>
-              <a:spcBef>
-                <a:spcPts val="300"/>
-              </a:spcBef>
-              <a:spcAft>
-                <a:spcPts val="300"/>
-              </a:spcAft>
-              <a:buNone/>
-            </a:pPr>
-            <a:r>
-              <a:rPr lang="en-US" sz="1200" dirty="0">
-                <a:solidFill>
-                  <a:srgbClr val="1C2833"/>
-                </a:solidFill>
-                <a:latin typeface="Arial" pitchFamily="34" charset="0"/>
-                <a:ea typeface="Arial" pitchFamily="34" charset="-122"/>
-                <a:cs typeface="Arial" pitchFamily="34" charset="-120"/>
-              </a:rPr>
-              <a:t>10000 − 89 = 9921</a:t>
-            </a:r>
-            <a:pPr algn="l" indent="0" marL="0">
-              <a:lnSpc>
-                <a:spcPts val="1680"/>
-              </a:lnSpc>
-              <a:spcBef>
-                <a:spcPts val="300"/>
-              </a:spcBef>
-              <a:spcAft>
-                <a:spcPts val="300"/>
-              </a:spcAft>
-              <a:buNone/>
-            </a:pPr>
-            <a:r>
-              <a:rPr lang="en-US" sz="1200" dirty="0">
-                <a:solidFill>
-                  <a:srgbClr val="1C2833"/>
-                </a:solidFill>
-                <a:latin typeface="Arial" pitchFamily="34" charset="0"/>
-                <a:ea typeface="Arial" pitchFamily="34" charset="-122"/>
-                <a:cs typeface="Arial" pitchFamily="34" charset="-120"/>
-              </a:rPr>
-              <a:t> because they treated 89 as "8 9" not "0 0 8 9." Reteach: pad with leading zeros to match the base's digit count. 2. </a:t>
-            </a:r>
-            <a:pPr algn="l" indent="0" marL="0">
-              <a:lnSpc>
-                <a:spcPts val="1680"/>
-              </a:lnSpc>
-              <a:spcBef>
-                <a:spcPts val="300"/>
-              </a:spcBef>
-              <a:spcAft>
-                <a:spcPts val="300"/>
-              </a:spcAft>
-              <a:buNone/>
-            </a:pPr>
-            <a:r>
-              <a:rPr lang="en-US" sz="1200" b="1" dirty="0">
-                <a:solidFill>
-                  <a:srgbClr val="1C2833"/>
-                </a:solidFill>
-                <a:latin typeface="Arial" pitchFamily="34" charset="0"/>
-                <a:ea typeface="Arial" pitchFamily="34" charset="-122"/>
-                <a:cs typeface="Arial" pitchFamily="34" charset="-120"/>
-              </a:rPr>
-              <a:t>Last-digit error</a:t>
-            </a:r>
-            <a:pPr algn="l" indent="0" marL="0">
-              <a:lnSpc>
-                <a:spcPts val="1680"/>
-              </a:lnSpc>
-              <a:spcBef>
-                <a:spcPts val="300"/>
-              </a:spcBef>
-              <a:spcAft>
-                <a:spcPts val="300"/>
-              </a:spcAft>
-              <a:buNone/>
-            </a:pPr>
-            <a:r>
-              <a:rPr lang="en-US" sz="1200" dirty="0">
-                <a:solidFill>
-                  <a:srgbClr val="1C2833"/>
-                </a:solidFill>
-                <a:latin typeface="Arial" pitchFamily="34" charset="0"/>
-                <a:ea typeface="Arial" pitchFamily="34" charset="-122"/>
-                <a:cs typeface="Arial" pitchFamily="34" charset="-120"/>
-              </a:rPr>
-              <a:t> — student wrote </a:t>
-            </a:r>
-            <a:pPr algn="l" indent="0" marL="0">
-              <a:lnSpc>
-                <a:spcPts val="1680"/>
-              </a:lnSpc>
-              <a:spcBef>
-                <a:spcPts val="300"/>
-              </a:spcBef>
-              <a:spcAft>
-                <a:spcPts val="300"/>
-              </a:spcAft>
-              <a:buNone/>
-            </a:pPr>
-            <a:r>
-              <a:rPr lang="en-US" sz="1200" dirty="0">
-                <a:solidFill>
-                  <a:srgbClr val="1C2833"/>
-                </a:solidFill>
-                <a:latin typeface="Arial" pitchFamily="34" charset="0"/>
-                <a:ea typeface="Arial" pitchFamily="34" charset="-122"/>
-                <a:cs typeface="Arial" pitchFamily="34" charset="-120"/>
-              </a:rPr>
-              <a:t>9-7 = 2</a:t>
-            </a:r>
-            <a:pPr algn="l" indent="0" marL="0">
-              <a:lnSpc>
-                <a:spcPts val="1680"/>
-              </a:lnSpc>
-              <a:spcBef>
-                <a:spcPts val="300"/>
-              </a:spcBef>
-              <a:spcAft>
-                <a:spcPts val="300"/>
-              </a:spcAft>
-              <a:buNone/>
-            </a:pPr>
-            <a:r>
-              <a:rPr lang="en-US" sz="1200" dirty="0">
-                <a:solidFill>
-                  <a:srgbClr val="1C2833"/>
-                </a:solidFill>
-                <a:latin typeface="Arial" pitchFamily="34" charset="0"/>
-                <a:ea typeface="Arial" pitchFamily="34" charset="-122"/>
-                <a:cs typeface="Arial" pitchFamily="34" charset="-120"/>
-              </a:rPr>
-              <a:t> for the units instead of </a:t>
-            </a:r>
-            <a:pPr algn="l" indent="0" marL="0">
-              <a:lnSpc>
-                <a:spcPts val="1680"/>
-              </a:lnSpc>
-              <a:spcBef>
-                <a:spcPts val="300"/>
-              </a:spcBef>
-              <a:spcAft>
-                <a:spcPts val="300"/>
-              </a:spcAft>
-              <a:buNone/>
-            </a:pPr>
-            <a:r>
-              <a:rPr lang="en-US" sz="1200" dirty="0">
-                <a:solidFill>
-                  <a:srgbClr val="1C2833"/>
-                </a:solidFill>
-                <a:latin typeface="Arial" pitchFamily="34" charset="0"/>
-                <a:ea typeface="Arial" pitchFamily="34" charset="-122"/>
-                <a:cs typeface="Arial" pitchFamily="34" charset="-120"/>
-              </a:rPr>
-              <a:t>10-7 = 3</a:t>
-            </a:r>
-            <a:pPr algn="l" indent="0" marL="0">
-              <a:lnSpc>
-                <a:spcPts val="1680"/>
-              </a:lnSpc>
-              <a:spcBef>
-                <a:spcPts val="300"/>
-              </a:spcBef>
-              <a:spcAft>
-                <a:spcPts val="300"/>
-              </a:spcAft>
-              <a:buNone/>
-            </a:pPr>
-            <a:r>
-              <a:rPr lang="en-US" sz="1200" dirty="0">
-                <a:solidFill>
-                  <a:srgbClr val="1C2833"/>
-                </a:solidFill>
-                <a:latin typeface="Arial" pitchFamily="34" charset="0"/>
-                <a:ea typeface="Arial" pitchFamily="34" charset="-122"/>
-                <a:cs typeface="Arial" pitchFamily="34" charset="-120"/>
-              </a:rPr>
-              <a:t>. Reteach: the LAST digit always takes from 10. Always. 3. </a:t>
-            </a:r>
-            <a:pPr algn="l" indent="0" marL="0">
-              <a:lnSpc>
-                <a:spcPts val="1680"/>
-              </a:lnSpc>
-              <a:spcBef>
-                <a:spcPts val="300"/>
-              </a:spcBef>
-              <a:spcAft>
-                <a:spcPts val="300"/>
-              </a:spcAft>
-              <a:buNone/>
-            </a:pPr>
-            <a:r>
-              <a:rPr lang="en-US" sz="1200" b="1" dirty="0">
-                <a:solidFill>
-                  <a:srgbClr val="1C2833"/>
-                </a:solidFill>
-                <a:latin typeface="Arial" pitchFamily="34" charset="0"/>
-                <a:ea typeface="Arial" pitchFamily="34" charset="-122"/>
-                <a:cs typeface="Arial" pitchFamily="34" charset="-120"/>
-              </a:rPr>
-              <a:t>Trailing-zero handling</a:t>
-            </a:r>
-            <a:pPr algn="l" indent="0" marL="0">
-              <a:lnSpc>
-                <a:spcPts val="1680"/>
-              </a:lnSpc>
-              <a:spcBef>
-                <a:spcPts val="300"/>
-              </a:spcBef>
-              <a:spcAft>
-                <a:spcPts val="300"/>
-              </a:spcAft>
-              <a:buNone/>
-            </a:pPr>
-            <a:r>
-              <a:rPr lang="en-US" sz="1200" dirty="0">
-                <a:solidFill>
-                  <a:srgbClr val="1C2833"/>
-                </a:solidFill>
-                <a:latin typeface="Arial" pitchFamily="34" charset="0"/>
-                <a:ea typeface="Arial" pitchFamily="34" charset="-122"/>
-                <a:cs typeface="Arial" pitchFamily="34" charset="-120"/>
-              </a:rPr>
-              <a:t> — </a:t>
-            </a:r>
-            <a:pPr algn="l" indent="0" marL="0">
-              <a:lnSpc>
-                <a:spcPts val="1680"/>
-              </a:lnSpc>
-              <a:spcBef>
-                <a:spcPts val="300"/>
-              </a:spcBef>
-              <a:spcAft>
-                <a:spcPts val="300"/>
-              </a:spcAft>
-              <a:buNone/>
-            </a:pPr>
-            <a:r>
-              <a:rPr lang="en-US" sz="1200" dirty="0">
-                <a:solidFill>
-                  <a:srgbClr val="1C2833"/>
-                </a:solidFill>
-                <a:latin typeface="Arial" pitchFamily="34" charset="0"/>
-                <a:ea typeface="Arial" pitchFamily="34" charset="-122"/>
-                <a:cs typeface="Arial" pitchFamily="34" charset="-120"/>
-              </a:rPr>
-              <a:t>1000 − 70</a:t>
-            </a:r>
-            <a:pPr algn="l" indent="0" marL="0">
-              <a:lnSpc>
-                <a:spcPts val="1680"/>
-              </a:lnSpc>
-              <a:spcBef>
-                <a:spcPts val="300"/>
-              </a:spcBef>
-              <a:spcAft>
-                <a:spcPts val="300"/>
-              </a:spcAft>
-              <a:buNone/>
-            </a:pPr>
-            <a:r>
-              <a:rPr lang="en-US" sz="1200" dirty="0">
-                <a:solidFill>
-                  <a:srgbClr val="1C2833"/>
-                </a:solidFill>
-                <a:latin typeface="Arial" pitchFamily="34" charset="0"/>
-                <a:ea typeface="Arial" pitchFamily="34" charset="-122"/>
-                <a:cs typeface="Arial" pitchFamily="34" charset="-120"/>
-              </a:rPr>
-              <a:t>: digit-wise gives </a:t>
-            </a:r>
-            <a:pPr algn="l" indent="0" marL="0">
-              <a:lnSpc>
-                <a:spcPts val="1680"/>
-              </a:lnSpc>
-              <a:spcBef>
-                <a:spcPts val="300"/>
-              </a:spcBef>
-              <a:spcAft>
-                <a:spcPts val="300"/>
-              </a:spcAft>
-              <a:buNone/>
-            </a:pPr>
-            <a:r>
-              <a:rPr lang="en-US" sz="1200" dirty="0">
-                <a:solidFill>
-                  <a:srgbClr val="1C2833"/>
-                </a:solidFill>
-                <a:latin typeface="Arial" pitchFamily="34" charset="0"/>
-                <a:ea typeface="Arial" pitchFamily="34" charset="-122"/>
-                <a:cs typeface="Arial" pitchFamily="34" charset="-120"/>
-              </a:rPr>
-              <a:t>9-0, 9-7, 10-0 = 9, 2, 10</a:t>
-            </a:r>
-            <a:pPr algn="l" indent="0" marL="0">
-              <a:lnSpc>
-                <a:spcPts val="1680"/>
-              </a:lnSpc>
-              <a:spcBef>
-                <a:spcPts val="300"/>
-              </a:spcBef>
-              <a:spcAft>
-                <a:spcPts val="300"/>
-              </a:spcAft>
-              <a:buNone/>
-            </a:pPr>
-            <a:r>
-              <a:rPr lang="en-US" sz="1200" dirty="0">
-                <a:solidFill>
-                  <a:srgbClr val="1C2833"/>
-                </a:solidFill>
-                <a:latin typeface="Arial" pitchFamily="34" charset="0"/>
-                <a:ea typeface="Arial" pitchFamily="34" charset="-122"/>
-                <a:cs typeface="Arial" pitchFamily="34" charset="-120"/>
-              </a:rPr>
-              <a:t>. The 10 carries: </a:t>
-            </a:r>
-            <a:pPr algn="l" indent="0" marL="0">
-              <a:lnSpc>
-                <a:spcPts val="1680"/>
-              </a:lnSpc>
-              <a:spcBef>
-                <a:spcPts val="300"/>
-              </a:spcBef>
-              <a:spcAft>
-                <a:spcPts val="300"/>
-              </a:spcAft>
-              <a:buNone/>
-            </a:pPr>
-            <a:r>
-              <a:rPr lang="en-US" sz="1200" dirty="0">
-                <a:solidFill>
-                  <a:srgbClr val="1C2833"/>
-                </a:solidFill>
-                <a:latin typeface="Arial" pitchFamily="34" charset="0"/>
-                <a:ea typeface="Arial" pitchFamily="34" charset="-122"/>
-                <a:cs typeface="Arial" pitchFamily="34" charset="-120"/>
-              </a:rPr>
-              <a:t>9, 3, 0</a:t>
-            </a:r>
-            <a:pPr algn="l" indent="0" marL="0">
-              <a:lnSpc>
-                <a:spcPts val="1680"/>
-              </a:lnSpc>
-              <a:spcBef>
-                <a:spcPts val="300"/>
-              </a:spcBef>
-              <a:spcAft>
-                <a:spcPts val="300"/>
-              </a:spcAft>
-              <a:buNone/>
-            </a:pPr>
-            <a:r>
-              <a:rPr lang="en-US" sz="1200" dirty="0">
-                <a:solidFill>
-                  <a:srgbClr val="1C2833"/>
-                </a:solidFill>
-                <a:latin typeface="Arial" pitchFamily="34" charset="0"/>
-                <a:ea typeface="Arial" pitchFamily="34" charset="-122"/>
-                <a:cs typeface="Arial" pitchFamily="34" charset="-120"/>
-              </a:rPr>
-              <a:t> → 930. Verify: 70 + 930 = 1000. ✓. Acknowledge this is a corner case; offer the easier "see 70 as 070, complement directly" framing.</a:t>
-            </a:r>
-            <a:endParaRPr lang="en-US" sz="1200" dirty="0"/>
-          </a:p>
-        </p:txBody>
-      </p:sp>
-      <p:sp>
-        <p:nvSpPr>
-          <p:cNvPr id="6" name="Text 4"/>
-          <p:cNvSpPr/>
-          <p:nvPr/>
-        </p:nvSpPr>
-        <p:spPr>
-          <a:xfrm>
-            <a:off x="406301" y="2341066"/>
-            <a:ext cx="8498026" cy="213271"/>
-          </a:xfrm>
-          <a:prstGeom prst="rect">
-            <a:avLst/>
-          </a:prstGeom>
-          <a:noFill/>
-          <a:ln/>
-        </p:spPr>
-        <p:txBody>
-          <a:bodyPr wrap="square" lIns="0" tIns="0" rIns="0" bIns="0" rtlCol="0" anchor="t"/>
-          <a:lstStyle/>
-          <a:p>
-            <a:pPr algn="l" indent="0" marL="0">
-              <a:lnSpc>
-                <a:spcPts val="1680"/>
-              </a:lnSpc>
-              <a:spcBef>
-                <a:spcPts val="300"/>
-              </a:spcBef>
-              <a:spcAft>
-                <a:spcPts val="300"/>
-              </a:spcAft>
-              <a:buNone/>
-            </a:pPr>
-            <a:r>
-              <a:rPr lang="en-US" sz="1200" dirty="0">
-                <a:solidFill>
-                  <a:srgbClr val="1C2833"/>
-                </a:solidFill>
-                <a:latin typeface="Arial" pitchFamily="34" charset="0"/>
-                <a:ea typeface="Arial" pitchFamily="34" charset="-122"/>
-                <a:cs typeface="Arial" pitchFamily="34" charset="-120"/>
-              </a:rPr>
-              <a:t>– Take questions.</a:t>
-            </a:r>
-            <a:endParaRPr lang="en-US" sz="1200" dirty="0"/>
-          </a:p>
-        </p:txBody>
-      </p:sp>
-      <p:sp>
-        <p:nvSpPr>
-          <p:cNvPr id="7" name="Text 5"/>
           <p:cNvSpPr/>
           <p:nvPr/>
         </p:nvSpPr>
@@ -6608,7 +7404,7 @@
                 <a:ea typeface="Georgia" pitchFamily="34" charset="-122"/>
                 <a:cs typeface="Georgia" pitchFamily="34" charset="-120"/>
               </a:rPr>
-              <a:t>Wrap-up (2 min)</a:t>
+              <a:t>Diagnostic discussion (10 min)</a:t>
             </a:r>
             <a:endParaRPr lang="en-US" sz="1800" dirty="0"/>
           </a:p>
@@ -6622,8 +7418,8 @@
         </p:nvSpPr>
         <p:spPr>
           <a:xfrm>
-            <a:off x="406301" y="870942"/>
-            <a:ext cx="8498026" cy="436066"/>
+            <a:off x="634901" y="883593"/>
+            <a:ext cx="8102798" cy="281880"/>
           </a:xfrm>
           <a:prstGeom prst="rect">
             <a:avLst/>
@@ -6635,97 +7431,26 @@
           <a:bodyPr wrap="square" lIns="0" tIns="0" rIns="0" bIns="0" rtlCol="0" anchor="t"/>
           <a:lstStyle/>
           <a:p>
-            <a:pPr algn="l" indent="0" marL="0">
-              <a:lnSpc>
-                <a:spcPts val="1680"/>
-              </a:lnSpc>
-              <a:spcBef>
-                <a:spcPts val="300"/>
-              </a:spcBef>
-              <a:spcAft>
-                <a:spcPts val="300"/>
-              </a:spcAft>
-              <a:buNone/>
-            </a:pPr>
-            <a:r>
-              <a:rPr lang="en-US" sz="1200" dirty="0">
-                <a:solidFill>
-                  <a:srgbClr val="1C2833"/>
-                </a:solidFill>
-                <a:latin typeface="Arial" pitchFamily="34" charset="0"/>
-                <a:ea typeface="Arial" pitchFamily="34" charset="-122"/>
-                <a:cs typeface="Arial" pitchFamily="34" charset="-120"/>
-              </a:rPr>
-              <a:t>– Project choice form due tomorrow. Three options: shopkeeper chart, teaching video, two's-complement poster. (See </a:t>
-            </a:r>
-            <a:pPr algn="l" indent="0" marL="0">
-              <a:lnSpc>
-                <a:spcPts val="1680"/>
-              </a:lnSpc>
-              <a:spcBef>
-                <a:spcPts val="300"/>
-              </a:spcBef>
-              <a:spcAft>
-                <a:spcPts val="300"/>
-              </a:spcAft>
-              <a:buNone/>
-            </a:pPr>
-            <a:r>
-              <a:rPr lang="en-US" sz="1200" dirty="0">
-                <a:solidFill>
-                  <a:srgbClr val="1C2833"/>
-                </a:solidFill>
-                <a:latin typeface="Arial" pitchFamily="34" charset="0"/>
-                <a:ea typeface="Arial" pitchFamily="34" charset="-122"/>
-                <a:cs typeface="Arial" pitchFamily="34" charset="-120"/>
-              </a:rPr>
-              <a:t>assessments/project-brief.md</a:t>
-            </a:r>
-            <a:pPr algn="l" indent="0" marL="0">
-              <a:lnSpc>
-                <a:spcPts val="1680"/>
-              </a:lnSpc>
-              <a:spcBef>
-                <a:spcPts val="300"/>
-              </a:spcBef>
-              <a:spcAft>
-                <a:spcPts val="300"/>
-              </a:spcAft>
-              <a:buNone/>
-            </a:pPr>
-            <a:r>
-              <a:rPr lang="en-US" sz="1200" dirty="0">
-                <a:solidFill>
-                  <a:srgbClr val="1C2833"/>
-                </a:solidFill>
-                <a:latin typeface="Arial" pitchFamily="34" charset="0"/>
-                <a:ea typeface="Arial" pitchFamily="34" charset="-122"/>
-                <a:cs typeface="Arial" pitchFamily="34" charset="-120"/>
-              </a:rPr>
-              <a:t>.) – Preview Day 6: </a:t>
-            </a:r>
-            <a:pPr algn="l" indent="0" marL="0">
-              <a:lnSpc>
-                <a:spcPts val="1680"/>
-              </a:lnSpc>
-              <a:spcBef>
-                <a:spcPts val="300"/>
-              </a:spcBef>
-              <a:spcAft>
-                <a:spcPts val="300"/>
-              </a:spcAft>
-              <a:buNone/>
-            </a:pPr>
-            <a:r>
-              <a:rPr lang="en-US" sz="1200" i="1" dirty="0">
-                <a:solidFill>
-                  <a:srgbClr val="1C2833"/>
-                </a:solidFill>
-                <a:latin typeface="Arial" pitchFamily="34" charset="0"/>
-                <a:ea typeface="Arial" pitchFamily="34" charset="-122"/>
-                <a:cs typeface="Arial" pitchFamily="34" charset="-120"/>
-              </a:rPr>
-              <a:t>"Why does this work? Tomorrow we prove it — with algebra."</a:t>
+            <a:pPr algn="l" marL="342900" indent="-342900">
+              <a:lnSpc>
+                <a:spcPts val="1620"/>
+              </a:lnSpc>
+              <a:spcAft>
+                <a:spcPts val="300"/>
+              </a:spcAft>
+              <a:buSzPct val="100000"/>
+              <a:buChar char="•"/>
+            </a:pPr>
+            <a:r>
+              <a:rPr lang="en-US" sz="1200" dirty="0">
+                <a:solidFill>
+                  <a:srgbClr val="1C2833"/>
+                </a:solidFill>
+                <a:latin typeface="Arial" pitchFamily="34" charset="0"/>
+                <a:ea typeface="Arial" pitchFamily="34" charset="-122"/>
+                <a:cs typeface="Arial" pitchFamily="34" charset="-120"/>
+              </a:rPr>
+              <a:t>While the quiz is being graded (or based on a quick teacher scan), call out three common error types on the board:</a:t>
             </a:r>
             <a:endParaRPr lang="en-US" sz="1200" dirty="0"/>
           </a:p>
